--- a/index/designs/y7-l11/l1-time-of-day/l1-time-of-day.pptx
+++ b/index/designs/y7-l11/l1-time-of-day/l1-time-of-day.pptx
@@ -3081,12 +3081,6 @@
               </a:rPr>
               <a:t>A:</a:t>
             </a:r>
-            <a:pPr algn="l" indent="0" marL="0">
-              <a:lnSpc>
-                <a:spcPts val="1920"/>
-              </a:lnSpc>
-              <a:buNone/>
-            </a:pPr>
             <a:r>
               <a:rPr lang="en-US" sz="1200" dirty="0">
                 <a:solidFill>
@@ -3098,12 +3092,6 @@
               </a:rPr>
               <a:t> 早上好！ </a:t>
             </a:r>
-            <a:pPr algn="l" indent="0" marL="0">
-              <a:lnSpc>
-                <a:spcPts val="1920"/>
-              </a:lnSpc>
-              <a:buNone/>
-            </a:pPr>
             <a:r>
               <a:rPr lang="en-US" sz="1200" b="1" dirty="0">
                 <a:solidFill>
@@ -3115,12 +3103,6 @@
               </a:rPr>
               <a:t>B:</a:t>
             </a:r>
-            <a:pPr algn="l" indent="0" marL="0">
-              <a:lnSpc>
-                <a:spcPts val="1920"/>
-              </a:lnSpc>
-              <a:buNone/>
-            </a:pPr>
             <a:r>
               <a:rPr lang="en-US" sz="1200" dirty="0">
                 <a:solidFill>
@@ -3132,12 +3114,6 @@
               </a:rPr>
               <a:t> 早上好！你要去哪儿？</a:t>
             </a:r>
-            <a:pPr algn="l" indent="0" marL="0">
-              <a:lnSpc>
-                <a:spcPts val="1920"/>
-              </a:lnSpc>
-              <a:buNone/>
-            </a:pPr>
             <a:r>
               <a:rPr lang="en-US" sz="900" dirty="0">
                 <a:solidFill>
@@ -7636,12 +7612,6 @@
               </a:rPr>
               <a:t>On paper, write the time-of-day word you find </a:t>
             </a:r>
-            <a:pPr algn="l" indent="0" marL="0">
-              <a:lnSpc>
-                <a:spcPts val="1470"/>
-              </a:lnSpc>
-              <a:buNone/>
-            </a:pPr>
             <a:r>
               <a:rPr lang="en-US" sz="1050" b="1" dirty="0">
                 <a:solidFill>
@@ -7653,12 +7623,6 @@
               </a:rPr>
               <a:t>easiest</a:t>
             </a:r>
-            <a:pPr algn="l" indent="0" marL="0">
-              <a:lnSpc>
-                <a:spcPts val="1470"/>
-              </a:lnSpc>
-              <a:buNone/>
-            </a:pPr>
             <a:r>
               <a:rPr lang="en-US" sz="1050" dirty="0">
                 <a:solidFill>
@@ -7670,12 +7634,6 @@
               </a:rPr>
               <a:t>, and one you still </a:t>
             </a:r>
-            <a:pPr algn="l" indent="0" marL="0">
-              <a:lnSpc>
-                <a:spcPts val="1470"/>
-              </a:lnSpc>
-              <a:buNone/>
-            </a:pPr>
             <a:r>
               <a:rPr lang="en-US" sz="1050" b="1" dirty="0">
                 <a:solidFill>
@@ -7687,12 +7645,6 @@
               </a:rPr>
               <a:t>mix up</a:t>
             </a:r>
-            <a:pPr algn="l" indent="0" marL="0">
-              <a:lnSpc>
-                <a:spcPts val="1470"/>
-              </a:lnSpc>
-              <a:buNone/>
-            </a:pPr>
             <a:r>
               <a:rPr lang="en-US" sz="1050" dirty="0">
                 <a:solidFill>
@@ -7824,12 +7776,6 @@
               </a:rPr>
               <a:t>Write the Chinese for </a:t>
             </a:r>
-            <a:pPr algn="l" indent="0" marL="0">
-              <a:lnSpc>
-                <a:spcPts val="1680"/>
-              </a:lnSpc>
-              <a:buNone/>
-            </a:pPr>
             <a:r>
               <a:rPr lang="en-US" sz="1200" b="1" dirty="0">
                 <a:solidFill>
@@ -7841,12 +7787,6 @@
               </a:rPr>
               <a:t>"morning" (5:00–8:00)</a:t>
             </a:r>
-            <a:pPr algn="l" indent="0" marL="0">
-              <a:lnSpc>
-                <a:spcPts val="1680"/>
-              </a:lnSpc>
-              <a:buNone/>
-            </a:pPr>
             <a:r>
               <a:rPr lang="en-US" sz="1200" dirty="0">
                 <a:solidFill>
@@ -7858,12 +7798,6 @@
               </a:rPr>
               <a:t> and </a:t>
             </a:r>
-            <a:pPr algn="l" indent="0" marL="0">
-              <a:lnSpc>
-                <a:spcPts val="1680"/>
-              </a:lnSpc>
-              <a:buNone/>
-            </a:pPr>
             <a:r>
               <a:rPr lang="en-US" sz="1200" b="1" dirty="0">
                 <a:solidFill>
@@ -7875,12 +7809,6 @@
               </a:rPr>
               <a:t>"morning" (before noon)</a:t>
             </a:r>
-            <a:pPr algn="l" indent="0" marL="0">
-              <a:lnSpc>
-                <a:spcPts val="1680"/>
-              </a:lnSpc>
-              <a:buNone/>
-            </a:pPr>
             <a:r>
               <a:rPr lang="en-US" sz="1200" dirty="0">
                 <a:solidFill>
@@ -8462,15 +8390,6 @@
               </a:rPr>
               <a:t>Today: </a:t>
             </a:r>
-            <a:pPr algn="ctr" indent="0" marL="0">
-              <a:lnSpc>
-                <a:spcPts val="1800"/>
-              </a:lnSpc>
-              <a:spcBef>
-                <a:spcPts val="1600"/>
-              </a:spcBef>
-              <a:buNone/>
-            </a:pPr>
             <a:r>
               <a:rPr lang="en-US" sz="1200" b="1" dirty="0">
                 <a:solidFill>
@@ -8482,15 +8401,6 @@
               </a:rPr>
               <a:t>早上 / 上午 / 中午 / 下午 / 晚上</a:t>
             </a:r>
-            <a:pPr algn="ctr" indent="0" marL="0">
-              <a:lnSpc>
-                <a:spcPts val="1800"/>
-              </a:lnSpc>
-              <a:spcBef>
-                <a:spcPts val="1600"/>
-              </a:spcBef>
-              <a:buNone/>
-            </a:pPr>
             <a:r>
               <a:rPr lang="en-US" sz="1200" dirty="0">
                 <a:solidFill>
@@ -10334,9 +10244,6 @@
               </a:rPr>
               <a:t>We are learning to write and use the </a:t>
             </a:r>
-            <a:pPr algn="l" indent="0" marL="0">
-              <a:buNone/>
-            </a:pPr>
             <a:r>
               <a:rPr lang="en-US" sz="1400" b="1" dirty="0">
                 <a:solidFill>
@@ -10348,9 +10255,6 @@
               </a:rPr>
               <a:t>five parts-of-day words</a:t>
             </a:r>
-            <a:pPr algn="l" indent="0" marL="0">
-              <a:buNone/>
-            </a:pPr>
             <a:r>
               <a:rPr lang="en-US" sz="1400" dirty="0">
                 <a:solidFill>
@@ -10474,9 +10378,6 @@
               </a:rPr>
               <a:t>I can write </a:t>
             </a:r>
-            <a:pPr algn="l" indent="0" marL="0">
-              <a:buNone/>
-            </a:pPr>
             <a:r>
               <a:rPr lang="en-US" sz="1200" b="1" dirty="0">
                 <a:solidFill>
@@ -10488,9 +10389,6 @@
               </a:rPr>
               <a:t>早上 / 上午 / 中午 / 下午 / 晚上</a:t>
             </a:r>
-            <a:pPr algn="l" indent="0" marL="0">
-              <a:buNone/>
-            </a:pPr>
             <a:r>
               <a:rPr lang="en-US" sz="1200" dirty="0">
                 <a:solidFill>
@@ -10656,9 +10554,6 @@
               </a:rPr>
               <a:t>I can match each time-of-day word to the </a:t>
             </a:r>
-            <a:pPr algn="l" indent="0" marL="0">
-              <a:buNone/>
-            </a:pPr>
             <a:r>
               <a:rPr lang="en-US" sz="1200" b="1" dirty="0">
                 <a:solidFill>
@@ -10670,9 +10565,6 @@
               </a:rPr>
               <a:t>correct time range</a:t>
             </a:r>
-            <a:pPr algn="l" indent="0" marL="0">
-              <a:buNone/>
-            </a:pPr>
             <a:r>
               <a:rPr lang="en-US" sz="1200" dirty="0">
                 <a:solidFill>
@@ -10838,9 +10730,6 @@
               </a:rPr>
               <a:t>I can complete a </a:t>
             </a:r>
-            <a:pPr algn="l" indent="0" marL="0">
-              <a:buNone/>
-            </a:pPr>
             <a:r>
               <a:rPr lang="en-US" sz="1200" b="1" dirty="0">
                 <a:solidFill>
@@ -10852,9 +10741,6 @@
               </a:rPr>
               <a:t>greeting</a:t>
             </a:r>
-            <a:pPr algn="l" indent="0" marL="0">
-              <a:buNone/>
-            </a:pPr>
             <a:r>
               <a:rPr lang="en-US" sz="1200" dirty="0">
                 <a:solidFill>
@@ -11236,6 +11122,75 @@
               </a:rPr>
               <a:t>早</a:t>
             </a:r>
+            <a:r>
+              <a:rPr lang="en-US" sz="1100" dirty="0">
+                <a:solidFill>
+                  <a:srgbClr val="1E2A38"/>
+                </a:solidFill>
+                <a:latin typeface="Noto Sans SC" pitchFamily="34" charset="0"/>
+                <a:ea typeface="Noto Sans SC" pitchFamily="34" charset="-122"/>
+                <a:cs typeface="Noto Sans SC" pitchFamily="34" charset="-120"/>
+              </a:rPr>
+              <a:t> </a:t>
+            </a:r>
+            <a:r>
+              <a:rPr lang="en-US" sz="1100" dirty="0">
+                <a:solidFill>
+                  <a:srgbClr val="3A7D8C"/>
+                </a:solidFill>
+                <a:latin typeface="Noto Sans SC" pitchFamily="34" charset="0"/>
+                <a:ea typeface="Noto Sans SC" pitchFamily="34" charset="-122"/>
+                <a:cs typeface="Noto Sans SC" pitchFamily="34" charset="-120"/>
+              </a:rPr>
+              <a:t>zǎo</a:t>
+            </a:r>
+            <a:r>
+              <a:rPr lang="en-US" sz="1100" dirty="0">
+                <a:solidFill>
+                  <a:srgbClr val="1E2A38"/>
+                </a:solidFill>
+                <a:latin typeface="Noto Sans SC" pitchFamily="34" charset="0"/>
+                <a:ea typeface="Noto Sans SC" pitchFamily="34" charset="-122"/>
+                <a:cs typeface="Noto Sans SC" pitchFamily="34" charset="-120"/>
+              </a:rPr>
+              <a:t> </a:t>
+            </a:r>
+            <a:r>
+              <a:rPr lang="en-US" sz="1100" dirty="0">
+                <a:solidFill>
+                  <a:srgbClr val="8B94A3"/>
+                </a:solidFill>
+                <a:latin typeface="Noto Sans SC" pitchFamily="34" charset="0"/>
+                <a:ea typeface="Noto Sans SC" pitchFamily="34" charset="-122"/>
+                <a:cs typeface="Noto Sans SC" pitchFamily="34" charset="-120"/>
+              </a:rPr>
+              <a:t>— early; morning</a:t>
+            </a:r>
+            <a:r>
+              <a:rPr lang="en-US" sz="1100" dirty="0">
+                <a:solidFill>
+                  <a:srgbClr val="1E2A38"/>
+                </a:solidFill>
+                <a:latin typeface="Noto Sans SC" pitchFamily="34" charset="0"/>
+                <a:ea typeface="Noto Sans SC" pitchFamily="34" charset="-122"/>
+                <a:cs typeface="Noto Sans SC" pitchFamily="34" charset="-120"/>
+              </a:rPr>
+              <a:t> </a:t>
+            </a:r>
+            <a:r>
+              <a:rPr lang="en-US" sz="800" dirty="0">
+                <a:solidFill>
+                  <a:srgbClr val="3A7D8C"/>
+                </a:solidFill>
+                <a:latin typeface="Noto Sans SC" pitchFamily="34" charset="0"/>
+                <a:ea typeface="Noto Sans SC" pitchFamily="34" charset="-122"/>
+                <a:cs typeface="Noto Sans SC" pitchFamily="34" charset="-120"/>
+              </a:rPr>
+              <a:t>[部件字]</a:t>
+            </a:r>
+            <a:endParaRPr lang="en-US" sz="1100" dirty="0"/>
+          </a:p>
+          <a:p>
             <a:pPr algn="l" indent="0" marL="0">
               <a:lnSpc>
                 <a:spcPts val="1705"/>
@@ -11243,6 +11198,17 @@
               <a:buNone/>
             </a:pPr>
             <a:r>
+              <a:rPr lang="en-US" sz="1300" b="1" dirty="0">
+                <a:solidFill>
+                  <a:srgbClr val="1E2A38"/>
+                </a:solidFill>
+                <a:latin typeface="Noto Sans SC" pitchFamily="34" charset="0"/>
+                <a:ea typeface="Noto Sans SC" pitchFamily="34" charset="-122"/>
+                <a:cs typeface="Noto Sans SC" pitchFamily="34" charset="-120"/>
+              </a:rPr>
+              <a:t>早上</a:t>
+            </a:r>
+            <a:r>
               <a:rPr lang="en-US" sz="1100" dirty="0">
                 <a:solidFill>
                   <a:srgbClr val="1E2A38"/>
@@ -11253,6 +11219,64 @@
               </a:rPr>
               <a:t> </a:t>
             </a:r>
+            <a:r>
+              <a:rPr lang="en-US" sz="1100" dirty="0">
+                <a:solidFill>
+                  <a:srgbClr val="3A7D8C"/>
+                </a:solidFill>
+                <a:latin typeface="Noto Sans SC" pitchFamily="34" charset="0"/>
+                <a:ea typeface="Noto Sans SC" pitchFamily="34" charset="-122"/>
+                <a:cs typeface="Noto Sans SC" pitchFamily="34" charset="-120"/>
+              </a:rPr>
+              <a:t>zǎo shàng</a:t>
+            </a:r>
+            <a:r>
+              <a:rPr lang="en-US" sz="1100" dirty="0">
+                <a:solidFill>
+                  <a:srgbClr val="1E2A38"/>
+                </a:solidFill>
+                <a:latin typeface="Noto Sans SC" pitchFamily="34" charset="0"/>
+                <a:ea typeface="Noto Sans SC" pitchFamily="34" charset="-122"/>
+                <a:cs typeface="Noto Sans SC" pitchFamily="34" charset="-120"/>
+              </a:rPr>
+              <a:t> </a:t>
+            </a:r>
+            <a:r>
+              <a:rPr lang="en-US" sz="1100" dirty="0">
+                <a:solidFill>
+                  <a:srgbClr val="8B94A3"/>
+                </a:solidFill>
+                <a:latin typeface="Noto Sans SC" pitchFamily="34" charset="0"/>
+                <a:ea typeface="Noto Sans SC" pitchFamily="34" charset="-122"/>
+                <a:cs typeface="Noto Sans SC" pitchFamily="34" charset="-120"/>
+              </a:rPr>
+              <a:t>— (early) morning</a:t>
+            </a:r>
+            <a:r>
+              <a:rPr lang="en-US" sz="1100" dirty="0">
+                <a:solidFill>
+                  <a:srgbClr val="1E2A38"/>
+                </a:solidFill>
+                <a:latin typeface="Noto Sans SC" pitchFamily="34" charset="0"/>
+                <a:ea typeface="Noto Sans SC" pitchFamily="34" charset="-122"/>
+                <a:cs typeface="Noto Sans SC" pitchFamily="34" charset="-120"/>
+              </a:rPr>
+              <a:t> </a:t>
+            </a:r>
+            <a:r>
+              <a:rPr lang="en-US" sz="800" dirty="0">
+                <a:solidFill>
+                  <a:srgbClr val="C8943E"/>
+                </a:solidFill>
+                <a:latin typeface="Noto Sans SC" pitchFamily="34" charset="0"/>
+                <a:ea typeface="Noto Sans SC" pitchFamily="34" charset="-122"/>
+                <a:cs typeface="Noto Sans SC" pitchFamily="34" charset="-120"/>
+              </a:rPr>
+              <a:t>[时间词]</a:t>
+            </a:r>
+            <a:endParaRPr lang="en-US" sz="1100" dirty="0"/>
+          </a:p>
+          <a:p>
             <a:pPr algn="l" indent="0" marL="0">
               <a:lnSpc>
                 <a:spcPts val="1705"/>
@@ -11260,16 +11284,85 @@
               <a:buNone/>
             </a:pPr>
             <a:r>
+              <a:rPr lang="en-US" sz="1300" b="1" dirty="0">
+                <a:solidFill>
+                  <a:srgbClr val="1E2A38"/>
+                </a:solidFill>
+                <a:latin typeface="Noto Sans SC" pitchFamily="34" charset="0"/>
+                <a:ea typeface="Noto Sans SC" pitchFamily="34" charset="-122"/>
+                <a:cs typeface="Noto Sans SC" pitchFamily="34" charset="-120"/>
+              </a:rPr>
+              <a:t>午</a:t>
+            </a:r>
+            <a:r>
               <a:rPr lang="en-US" sz="1100" dirty="0">
                 <a:solidFill>
+                  <a:srgbClr val="1E2A38"/>
+                </a:solidFill>
+                <a:latin typeface="Noto Sans SC" pitchFamily="34" charset="0"/>
+                <a:ea typeface="Noto Sans SC" pitchFamily="34" charset="-122"/>
+                <a:cs typeface="Noto Sans SC" pitchFamily="34" charset="-120"/>
+              </a:rPr>
+              <a:t> </a:t>
+            </a:r>
+            <a:r>
+              <a:rPr lang="en-US" sz="1100" dirty="0">
+                <a:solidFill>
                   <a:srgbClr val="3A7D8C"/>
                 </a:solidFill>
                 <a:latin typeface="Noto Sans SC" pitchFamily="34" charset="0"/>
                 <a:ea typeface="Noto Sans SC" pitchFamily="34" charset="-122"/>
                 <a:cs typeface="Noto Sans SC" pitchFamily="34" charset="-120"/>
               </a:rPr>
-              <a:t>zǎo</a:t>
-            </a:r>
+              <a:t>wǔ</a:t>
+            </a:r>
+            <a:r>
+              <a:rPr lang="en-US" sz="1100" dirty="0">
+                <a:solidFill>
+                  <a:srgbClr val="1E2A38"/>
+                </a:solidFill>
+                <a:latin typeface="Noto Sans SC" pitchFamily="34" charset="0"/>
+                <a:ea typeface="Noto Sans SC" pitchFamily="34" charset="-122"/>
+                <a:cs typeface="Noto Sans SC" pitchFamily="34" charset="-120"/>
+              </a:rPr>
+              <a:t> </a:t>
+            </a:r>
+            <a:r>
+              <a:rPr lang="en-US" sz="1100" dirty="0">
+                <a:solidFill>
+                  <a:srgbClr val="8B94A3"/>
+                </a:solidFill>
+                <a:latin typeface="Noto Sans SC" pitchFamily="34" charset="0"/>
+                <a:ea typeface="Noto Sans SC" pitchFamily="34" charset="-122"/>
+                <a:cs typeface="Noto Sans SC" pitchFamily="34" charset="-120"/>
+              </a:rPr>
+              <a:t>— noon</a:t>
+            </a:r>
+            <a:r>
+              <a:rPr lang="en-US" sz="1100" dirty="0">
+                <a:solidFill>
+                  <a:srgbClr val="1E2A38"/>
+                </a:solidFill>
+                <a:latin typeface="Noto Sans SC" pitchFamily="34" charset="0"/>
+                <a:ea typeface="Noto Sans SC" pitchFamily="34" charset="-122"/>
+                <a:cs typeface="Noto Sans SC" pitchFamily="34" charset="-120"/>
+              </a:rPr>
+              <a:t> </a:t>
+            </a:r>
+            <a:r>
+              <a:rPr lang="en-US" sz="800" dirty="0">
+                <a:solidFill>
+                  <a:srgbClr val="3A7D8C"/>
+                </a:solidFill>
+                <a:latin typeface="Noto Sans SC" pitchFamily="34" charset="0"/>
+                <a:ea typeface="Noto Sans SC" pitchFamily="34" charset="-122"/>
+                <a:cs typeface="Noto Sans SC" pitchFamily="34" charset="-120"/>
+              </a:rPr>
+              <a:t>[部件字]</a:t>
+            </a:r>
+            <a:endParaRPr lang="en-US" sz="1100" dirty="0"/>
+          </a:p>
+          <a:p>
             <a:pPr algn="l" indent="0" marL="0">
               <a:lnSpc>
                 <a:spcPts val="1705"/>
@@ -11277,6 +11370,17 @@
               <a:buNone/>
             </a:pPr>
             <a:r>
+              <a:rPr lang="en-US" sz="1300" b="1" dirty="0">
+                <a:solidFill>
+                  <a:srgbClr val="1E2A38"/>
+                </a:solidFill>
+                <a:latin typeface="Noto Sans SC" pitchFamily="34" charset="0"/>
+                <a:ea typeface="Noto Sans SC" pitchFamily="34" charset="-122"/>
+                <a:cs typeface="Noto Sans SC" pitchFamily="34" charset="-120"/>
+              </a:rPr>
+              <a:t>上午</a:t>
+            </a:r>
+            <a:r>
               <a:rPr lang="en-US" sz="1100" dirty="0">
                 <a:solidFill>
                   <a:srgbClr val="1E2A38"/>
@@ -11287,6 +11391,64 @@
               </a:rPr>
               <a:t> </a:t>
             </a:r>
+            <a:r>
+              <a:rPr lang="en-US" sz="1100" dirty="0">
+                <a:solidFill>
+                  <a:srgbClr val="3A7D8C"/>
+                </a:solidFill>
+                <a:latin typeface="Noto Sans SC" pitchFamily="34" charset="0"/>
+                <a:ea typeface="Noto Sans SC" pitchFamily="34" charset="-122"/>
+                <a:cs typeface="Noto Sans SC" pitchFamily="34" charset="-120"/>
+              </a:rPr>
+              <a:t>shàng wǔ</a:t>
+            </a:r>
+            <a:r>
+              <a:rPr lang="en-US" sz="1100" dirty="0">
+                <a:solidFill>
+                  <a:srgbClr val="1E2A38"/>
+                </a:solidFill>
+                <a:latin typeface="Noto Sans SC" pitchFamily="34" charset="0"/>
+                <a:ea typeface="Noto Sans SC" pitchFamily="34" charset="-122"/>
+                <a:cs typeface="Noto Sans SC" pitchFamily="34" charset="-120"/>
+              </a:rPr>
+              <a:t> </a:t>
+            </a:r>
+            <a:r>
+              <a:rPr lang="en-US" sz="1100" dirty="0">
+                <a:solidFill>
+                  <a:srgbClr val="8B94A3"/>
+                </a:solidFill>
+                <a:latin typeface="Noto Sans SC" pitchFamily="34" charset="0"/>
+                <a:ea typeface="Noto Sans SC" pitchFamily="34" charset="-122"/>
+                <a:cs typeface="Noto Sans SC" pitchFamily="34" charset="-120"/>
+              </a:rPr>
+              <a:t>— before noon; morning</a:t>
+            </a:r>
+            <a:r>
+              <a:rPr lang="en-US" sz="1100" dirty="0">
+                <a:solidFill>
+                  <a:srgbClr val="1E2A38"/>
+                </a:solidFill>
+                <a:latin typeface="Noto Sans SC" pitchFamily="34" charset="0"/>
+                <a:ea typeface="Noto Sans SC" pitchFamily="34" charset="-122"/>
+                <a:cs typeface="Noto Sans SC" pitchFamily="34" charset="-120"/>
+              </a:rPr>
+              <a:t> </a:t>
+            </a:r>
+            <a:r>
+              <a:rPr lang="en-US" sz="800" dirty="0">
+                <a:solidFill>
+                  <a:srgbClr val="C8943E"/>
+                </a:solidFill>
+                <a:latin typeface="Noto Sans SC" pitchFamily="34" charset="0"/>
+                <a:ea typeface="Noto Sans SC" pitchFamily="34" charset="-122"/>
+                <a:cs typeface="Noto Sans SC" pitchFamily="34" charset="-120"/>
+              </a:rPr>
+              <a:t>[时间词]</a:t>
+            </a:r>
+            <a:endParaRPr lang="en-US" sz="1100" dirty="0"/>
+          </a:p>
+          <a:p>
             <a:pPr algn="l" indent="0" marL="0">
               <a:lnSpc>
                 <a:spcPts val="1705"/>
@@ -11294,16 +11456,85 @@
               <a:buNone/>
             </a:pPr>
             <a:r>
+              <a:rPr lang="en-US" sz="1300" b="1" dirty="0">
+                <a:solidFill>
+                  <a:srgbClr val="1E2A38"/>
+                </a:solidFill>
+                <a:latin typeface="Noto Sans SC" pitchFamily="34" charset="0"/>
+                <a:ea typeface="Noto Sans SC" pitchFamily="34" charset="-122"/>
+                <a:cs typeface="Noto Sans SC" pitchFamily="34" charset="-120"/>
+              </a:rPr>
+              <a:t>中午</a:t>
+            </a:r>
+            <a:r>
               <a:rPr lang="en-US" sz="1100" dirty="0">
                 <a:solidFill>
+                  <a:srgbClr val="1E2A38"/>
+                </a:solidFill>
+                <a:latin typeface="Noto Sans SC" pitchFamily="34" charset="0"/>
+                <a:ea typeface="Noto Sans SC" pitchFamily="34" charset="-122"/>
+                <a:cs typeface="Noto Sans SC" pitchFamily="34" charset="-120"/>
+              </a:rPr>
+              <a:t> </a:t>
+            </a:r>
+            <a:r>
+              <a:rPr lang="en-US" sz="1100" dirty="0">
+                <a:solidFill>
+                  <a:srgbClr val="3A7D8C"/>
+                </a:solidFill>
+                <a:latin typeface="Noto Sans SC" pitchFamily="34" charset="0"/>
+                <a:ea typeface="Noto Sans SC" pitchFamily="34" charset="-122"/>
+                <a:cs typeface="Noto Sans SC" pitchFamily="34" charset="-120"/>
+              </a:rPr>
+              <a:t>zhōng wǔ</a:t>
+            </a:r>
+            <a:r>
+              <a:rPr lang="en-US" sz="1100" dirty="0">
+                <a:solidFill>
+                  <a:srgbClr val="1E2A38"/>
+                </a:solidFill>
+                <a:latin typeface="Noto Sans SC" pitchFamily="34" charset="0"/>
+                <a:ea typeface="Noto Sans SC" pitchFamily="34" charset="-122"/>
+                <a:cs typeface="Noto Sans SC" pitchFamily="34" charset="-120"/>
+              </a:rPr>
+              <a:t> </a:t>
+            </a:r>
+            <a:r>
+              <a:rPr lang="en-US" sz="1100" dirty="0">
+                <a:solidFill>
                   <a:srgbClr val="8B94A3"/>
                 </a:solidFill>
                 <a:latin typeface="Noto Sans SC" pitchFamily="34" charset="0"/>
                 <a:ea typeface="Noto Sans SC" pitchFamily="34" charset="-122"/>
                 <a:cs typeface="Noto Sans SC" pitchFamily="34" charset="-120"/>
               </a:rPr>
-              <a:t>— early; morning</a:t>
-            </a:r>
+              <a:t>— noon</a:t>
+            </a:r>
+            <a:r>
+              <a:rPr lang="en-US" sz="1100" dirty="0">
+                <a:solidFill>
+                  <a:srgbClr val="1E2A38"/>
+                </a:solidFill>
+                <a:latin typeface="Noto Sans SC" pitchFamily="34" charset="0"/>
+                <a:ea typeface="Noto Sans SC" pitchFamily="34" charset="-122"/>
+                <a:cs typeface="Noto Sans SC" pitchFamily="34" charset="-120"/>
+              </a:rPr>
+              <a:t> </a:t>
+            </a:r>
+            <a:r>
+              <a:rPr lang="en-US" sz="800" dirty="0">
+                <a:solidFill>
+                  <a:srgbClr val="C8943E"/>
+                </a:solidFill>
+                <a:latin typeface="Noto Sans SC" pitchFamily="34" charset="0"/>
+                <a:ea typeface="Noto Sans SC" pitchFamily="34" charset="-122"/>
+                <a:cs typeface="Noto Sans SC" pitchFamily="34" charset="-120"/>
+              </a:rPr>
+              <a:t>[时间词]</a:t>
+            </a:r>
+            <a:endParaRPr lang="en-US" sz="1100" dirty="0"/>
+          </a:p>
+          <a:p>
             <a:pPr algn="l" indent="0" marL="0">
               <a:lnSpc>
                 <a:spcPts val="1705"/>
@@ -11311,6 +11542,17 @@
               <a:buNone/>
             </a:pPr>
             <a:r>
+              <a:rPr lang="en-US" sz="1300" b="1" dirty="0">
+                <a:solidFill>
+                  <a:srgbClr val="1E2A38"/>
+                </a:solidFill>
+                <a:latin typeface="Noto Sans SC" pitchFamily="34" charset="0"/>
+                <a:ea typeface="Noto Sans SC" pitchFamily="34" charset="-122"/>
+                <a:cs typeface="Noto Sans SC" pitchFamily="34" charset="-120"/>
+              </a:rPr>
+              <a:t>下午</a:t>
+            </a:r>
+            <a:r>
               <a:rPr lang="en-US" sz="1100" dirty="0">
                 <a:solidFill>
                   <a:srgbClr val="1E2A38"/>
@@ -11321,6 +11563,64 @@
               </a:rPr>
               <a:t> </a:t>
             </a:r>
+            <a:r>
+              <a:rPr lang="en-US" sz="1100" dirty="0">
+                <a:solidFill>
+                  <a:srgbClr val="3A7D8C"/>
+                </a:solidFill>
+                <a:latin typeface="Noto Sans SC" pitchFamily="34" charset="0"/>
+                <a:ea typeface="Noto Sans SC" pitchFamily="34" charset="-122"/>
+                <a:cs typeface="Noto Sans SC" pitchFamily="34" charset="-120"/>
+              </a:rPr>
+              <a:t>xià wǔ</a:t>
+            </a:r>
+            <a:r>
+              <a:rPr lang="en-US" sz="1100" dirty="0">
+                <a:solidFill>
+                  <a:srgbClr val="1E2A38"/>
+                </a:solidFill>
+                <a:latin typeface="Noto Sans SC" pitchFamily="34" charset="0"/>
+                <a:ea typeface="Noto Sans SC" pitchFamily="34" charset="-122"/>
+                <a:cs typeface="Noto Sans SC" pitchFamily="34" charset="-120"/>
+              </a:rPr>
+              <a:t> </a:t>
+            </a:r>
+            <a:r>
+              <a:rPr lang="en-US" sz="1100" dirty="0">
+                <a:solidFill>
+                  <a:srgbClr val="8B94A3"/>
+                </a:solidFill>
+                <a:latin typeface="Noto Sans SC" pitchFamily="34" charset="0"/>
+                <a:ea typeface="Noto Sans SC" pitchFamily="34" charset="-122"/>
+                <a:cs typeface="Noto Sans SC" pitchFamily="34" charset="-120"/>
+              </a:rPr>
+              <a:t>— afternoon</a:t>
+            </a:r>
+            <a:r>
+              <a:rPr lang="en-US" sz="1100" dirty="0">
+                <a:solidFill>
+                  <a:srgbClr val="1E2A38"/>
+                </a:solidFill>
+                <a:latin typeface="Noto Sans SC" pitchFamily="34" charset="0"/>
+                <a:ea typeface="Noto Sans SC" pitchFamily="34" charset="-122"/>
+                <a:cs typeface="Noto Sans SC" pitchFamily="34" charset="-120"/>
+              </a:rPr>
+              <a:t> </a:t>
+            </a:r>
+            <a:r>
+              <a:rPr lang="en-US" sz="800" dirty="0">
+                <a:solidFill>
+                  <a:srgbClr val="C8943E"/>
+                </a:solidFill>
+                <a:latin typeface="Noto Sans SC" pitchFamily="34" charset="0"/>
+                <a:ea typeface="Noto Sans SC" pitchFamily="34" charset="-122"/>
+                <a:cs typeface="Noto Sans SC" pitchFamily="34" charset="-120"/>
+              </a:rPr>
+              <a:t>[时间词]</a:t>
+            </a:r>
+            <a:endParaRPr lang="en-US" sz="1100" dirty="0"/>
+          </a:p>
+          <a:p>
             <a:pPr algn="l" indent="0" marL="0">
               <a:lnSpc>
                 <a:spcPts val="1705"/>
@@ -11328,15 +11628,81 @@
               <a:buNone/>
             </a:pPr>
             <a:r>
+              <a:rPr lang="en-US" sz="1300" b="1" dirty="0">
+                <a:solidFill>
+                  <a:srgbClr val="1E2A38"/>
+                </a:solidFill>
+                <a:latin typeface="Noto Sans SC" pitchFamily="34" charset="0"/>
+                <a:ea typeface="Noto Sans SC" pitchFamily="34" charset="-122"/>
+                <a:cs typeface="Noto Sans SC" pitchFamily="34" charset="-120"/>
+              </a:rPr>
+              <a:t>晚上</a:t>
+            </a:r>
+            <a:r>
+              <a:rPr lang="en-US" sz="1100" dirty="0">
+                <a:solidFill>
+                  <a:srgbClr val="1E2A38"/>
+                </a:solidFill>
+                <a:latin typeface="Noto Sans SC" pitchFamily="34" charset="0"/>
+                <a:ea typeface="Noto Sans SC" pitchFamily="34" charset="-122"/>
+                <a:cs typeface="Noto Sans SC" pitchFamily="34" charset="-120"/>
+              </a:rPr>
+              <a:t> </a:t>
+            </a:r>
+            <a:r>
+              <a:rPr lang="en-US" sz="1100" dirty="0">
+                <a:solidFill>
+                  <a:srgbClr val="3A7D8C"/>
+                </a:solidFill>
+                <a:latin typeface="Noto Sans SC" pitchFamily="34" charset="0"/>
+                <a:ea typeface="Noto Sans SC" pitchFamily="34" charset="-122"/>
+                <a:cs typeface="Noto Sans SC" pitchFamily="34" charset="-120"/>
+              </a:rPr>
+              <a:t>wǎn shàng</a:t>
+            </a:r>
+            <a:r>
+              <a:rPr lang="en-US" sz="1100" dirty="0">
+                <a:solidFill>
+                  <a:srgbClr val="1E2A38"/>
+                </a:solidFill>
+                <a:latin typeface="Noto Sans SC" pitchFamily="34" charset="0"/>
+                <a:ea typeface="Noto Sans SC" pitchFamily="34" charset="-122"/>
+                <a:cs typeface="Noto Sans SC" pitchFamily="34" charset="-120"/>
+              </a:rPr>
+              <a:t> </a:t>
+            </a:r>
+            <a:r>
+              <a:rPr lang="en-US" sz="1100" dirty="0">
+                <a:solidFill>
+                  <a:srgbClr val="8B94A3"/>
+                </a:solidFill>
+                <a:latin typeface="Noto Sans SC" pitchFamily="34" charset="0"/>
+                <a:ea typeface="Noto Sans SC" pitchFamily="34" charset="-122"/>
+                <a:cs typeface="Noto Sans SC" pitchFamily="34" charset="-120"/>
+              </a:rPr>
+              <a:t>— (in the) evening</a:t>
+            </a:r>
+            <a:r>
+              <a:rPr lang="en-US" sz="1100" dirty="0">
+                <a:solidFill>
+                  <a:srgbClr val="1E2A38"/>
+                </a:solidFill>
+                <a:latin typeface="Noto Sans SC" pitchFamily="34" charset="0"/>
+                <a:ea typeface="Noto Sans SC" pitchFamily="34" charset="-122"/>
+                <a:cs typeface="Noto Sans SC" pitchFamily="34" charset="-120"/>
+              </a:rPr>
+              <a:t> </a:t>
+            </a:r>
+            <a:r>
               <a:rPr lang="en-US" sz="800" dirty="0">
                 <a:solidFill>
-                  <a:srgbClr val="3A7D8C"/>
-                </a:solidFill>
-                <a:latin typeface="Noto Sans SC" pitchFamily="34" charset="0"/>
-                <a:ea typeface="Noto Sans SC" pitchFamily="34" charset="-122"/>
-                <a:cs typeface="Noto Sans SC" pitchFamily="34" charset="-120"/>
-              </a:rPr>
-              <a:t>[部件字]</a:t>
+                  <a:srgbClr val="C8943E"/>
+                </a:solidFill>
+                <a:latin typeface="Noto Sans SC" pitchFamily="34" charset="0"/>
+                <a:ea typeface="Noto Sans SC" pitchFamily="34" charset="-122"/>
+                <a:cs typeface="Noto Sans SC" pitchFamily="34" charset="-120"/>
+              </a:rPr>
+              <a:t>[时间词]</a:t>
             </a:r>
             <a:endParaRPr lang="en-US" sz="1100" dirty="0"/>
           </a:p>
@@ -11356,8 +11722,77 @@
                 <a:ea typeface="Noto Sans SC" pitchFamily="34" charset="-122"/>
                 <a:cs typeface="Noto Sans SC" pitchFamily="34" charset="-120"/>
               </a:rPr>
-              <a:t>早上</a:t>
-            </a:r>
+              <a:t>下</a:t>
+            </a:r>
+            <a:r>
+              <a:rPr lang="en-US" sz="1100" dirty="0">
+                <a:solidFill>
+                  <a:srgbClr val="1E2A38"/>
+                </a:solidFill>
+                <a:latin typeface="Noto Sans SC" pitchFamily="34" charset="0"/>
+                <a:ea typeface="Noto Sans SC" pitchFamily="34" charset="-122"/>
+                <a:cs typeface="Noto Sans SC" pitchFamily="34" charset="-120"/>
+              </a:rPr>
+              <a:t> </a:t>
+            </a:r>
+            <a:r>
+              <a:rPr lang="en-US" sz="1100" dirty="0">
+                <a:solidFill>
+                  <a:srgbClr val="3A7D8C"/>
+                </a:solidFill>
+                <a:latin typeface="Noto Sans SC" pitchFamily="34" charset="0"/>
+                <a:ea typeface="Noto Sans SC" pitchFamily="34" charset="-122"/>
+                <a:cs typeface="Noto Sans SC" pitchFamily="34" charset="-120"/>
+              </a:rPr>
+              <a:t>xià</a:t>
+            </a:r>
+            <a:r>
+              <a:rPr lang="en-US" sz="1100" dirty="0">
+                <a:solidFill>
+                  <a:srgbClr val="1E2A38"/>
+                </a:solidFill>
+                <a:latin typeface="Noto Sans SC" pitchFamily="34" charset="0"/>
+                <a:ea typeface="Noto Sans SC" pitchFamily="34" charset="-122"/>
+                <a:cs typeface="Noto Sans SC" pitchFamily="34" charset="-120"/>
+              </a:rPr>
+              <a:t> </a:t>
+            </a:r>
+            <a:r>
+              <a:rPr lang="en-US" sz="1100" dirty="0">
+                <a:solidFill>
+                  <a:srgbClr val="8B94A3"/>
+                </a:solidFill>
+                <a:latin typeface="Noto Sans SC" pitchFamily="34" charset="0"/>
+                <a:ea typeface="Noto Sans SC" pitchFamily="34" charset="-122"/>
+                <a:cs typeface="Noto Sans SC" pitchFamily="34" charset="-120"/>
+              </a:rPr>
+              <a:t>— down; get off</a:t>
+            </a:r>
+            <a:r>
+              <a:rPr lang="en-US" sz="1100" dirty="0">
+                <a:solidFill>
+                  <a:srgbClr val="1E2A38"/>
+                </a:solidFill>
+                <a:latin typeface="Noto Sans SC" pitchFamily="34" charset="0"/>
+                <a:ea typeface="Noto Sans SC" pitchFamily="34" charset="-122"/>
+                <a:cs typeface="Noto Sans SC" pitchFamily="34" charset="-120"/>
+              </a:rPr>
+              <a:t> </a:t>
+            </a:r>
+            <a:r>
+              <a:rPr lang="en-US" sz="800" dirty="0">
+                <a:solidFill>
+                  <a:srgbClr val="3A7D8C"/>
+                </a:solidFill>
+                <a:latin typeface="Noto Sans SC" pitchFamily="34" charset="0"/>
+                <a:ea typeface="Noto Sans SC" pitchFamily="34" charset="-122"/>
+                <a:cs typeface="Noto Sans SC" pitchFamily="34" charset="-120"/>
+              </a:rPr>
+              <a:t>[部件字]</a:t>
+            </a:r>
+            <a:endParaRPr lang="en-US" sz="1100" dirty="0"/>
+          </a:p>
+          <a:p>
             <a:pPr algn="l" indent="0" marL="0">
               <a:lnSpc>
                 <a:spcPts val="1705"/>
@@ -11365,6 +11800,17 @@
               <a:buNone/>
             </a:pPr>
             <a:r>
+              <a:rPr lang="en-US" sz="1300" b="1" dirty="0">
+                <a:solidFill>
+                  <a:srgbClr val="1E2A38"/>
+                </a:solidFill>
+                <a:latin typeface="Noto Sans SC" pitchFamily="34" charset="0"/>
+                <a:ea typeface="Noto Sans SC" pitchFamily="34" charset="-122"/>
+                <a:cs typeface="Noto Sans SC" pitchFamily="34" charset="-120"/>
+              </a:rPr>
+              <a:t>晚</a:t>
+            </a:r>
+            <a:r>
               <a:rPr lang="en-US" sz="1100" dirty="0">
                 <a:solidFill>
                   <a:srgbClr val="1E2A38"/>
@@ -11375,12 +11821,6 @@
               </a:rPr>
               <a:t> </a:t>
             </a:r>
-            <a:pPr algn="l" indent="0" marL="0">
-              <a:lnSpc>
-                <a:spcPts val="1705"/>
-              </a:lnSpc>
-              <a:buNone/>
-            </a:pPr>
             <a:r>
               <a:rPr lang="en-US" sz="1100" dirty="0">
                 <a:solidFill>
@@ -11390,14 +11830,8 @@
                 <a:ea typeface="Noto Sans SC" pitchFamily="34" charset="-122"/>
                 <a:cs typeface="Noto Sans SC" pitchFamily="34" charset="-120"/>
               </a:rPr>
-              <a:t>zǎo shàng</a:t>
-            </a:r>
-            <a:pPr algn="l" indent="0" marL="0">
-              <a:lnSpc>
-                <a:spcPts val="1705"/>
-              </a:lnSpc>
-              <a:buNone/>
-            </a:pPr>
+              <a:t>wǎn</a:t>
+            </a:r>
             <a:r>
               <a:rPr lang="en-US" sz="1100" dirty="0">
                 <a:solidFill>
@@ -11409,12 +11843,6 @@
               </a:rPr>
               <a:t> </a:t>
             </a:r>
-            <a:pPr algn="l" indent="0" marL="0">
-              <a:lnSpc>
-                <a:spcPts val="1705"/>
-              </a:lnSpc>
-              <a:buNone/>
-            </a:pPr>
             <a:r>
               <a:rPr lang="en-US" sz="1100" dirty="0">
                 <a:solidFill>
@@ -11424,14 +11852,8 @@
                 <a:ea typeface="Noto Sans SC" pitchFamily="34" charset="-122"/>
                 <a:cs typeface="Noto Sans SC" pitchFamily="34" charset="-120"/>
               </a:rPr>
-              <a:t>— (early) morning</a:t>
-            </a:r>
-            <a:pPr algn="l" indent="0" marL="0">
-              <a:lnSpc>
-                <a:spcPts val="1705"/>
-              </a:lnSpc>
-              <a:buNone/>
-            </a:pPr>
+              <a:t>— evening; late</a:t>
+            </a:r>
             <a:r>
               <a:rPr lang="en-US" sz="1100" dirty="0">
                 <a:solidFill>
@@ -11443,866 +11865,6 @@
               </a:rPr>
               <a:t> </a:t>
             </a:r>
-            <a:pPr algn="l" indent="0" marL="0">
-              <a:lnSpc>
-                <a:spcPts val="1705"/>
-              </a:lnSpc>
-              <a:buNone/>
-            </a:pPr>
-            <a:r>
-              <a:rPr lang="en-US" sz="800" dirty="0">
-                <a:solidFill>
-                  <a:srgbClr val="C8943E"/>
-                </a:solidFill>
-                <a:latin typeface="Noto Sans SC" pitchFamily="34" charset="0"/>
-                <a:ea typeface="Noto Sans SC" pitchFamily="34" charset="-122"/>
-                <a:cs typeface="Noto Sans SC" pitchFamily="34" charset="-120"/>
-              </a:rPr>
-              <a:t>[时间词]</a:t>
-            </a:r>
-            <a:endParaRPr lang="en-US" sz="1100" dirty="0"/>
-          </a:p>
-          <a:p>
-            <a:pPr algn="l" indent="0" marL="0">
-              <a:lnSpc>
-                <a:spcPts val="1705"/>
-              </a:lnSpc>
-              <a:buNone/>
-            </a:pPr>
-            <a:r>
-              <a:rPr lang="en-US" sz="1300" b="1" dirty="0">
-                <a:solidFill>
-                  <a:srgbClr val="1E2A38"/>
-                </a:solidFill>
-                <a:latin typeface="Noto Sans SC" pitchFamily="34" charset="0"/>
-                <a:ea typeface="Noto Sans SC" pitchFamily="34" charset="-122"/>
-                <a:cs typeface="Noto Sans SC" pitchFamily="34" charset="-120"/>
-              </a:rPr>
-              <a:t>午</a:t>
-            </a:r>
-            <a:pPr algn="l" indent="0" marL="0">
-              <a:lnSpc>
-                <a:spcPts val="1705"/>
-              </a:lnSpc>
-              <a:buNone/>
-            </a:pPr>
-            <a:r>
-              <a:rPr lang="en-US" sz="1100" dirty="0">
-                <a:solidFill>
-                  <a:srgbClr val="1E2A38"/>
-                </a:solidFill>
-                <a:latin typeface="Noto Sans SC" pitchFamily="34" charset="0"/>
-                <a:ea typeface="Noto Sans SC" pitchFamily="34" charset="-122"/>
-                <a:cs typeface="Noto Sans SC" pitchFamily="34" charset="-120"/>
-              </a:rPr>
-              <a:t> </a:t>
-            </a:r>
-            <a:pPr algn="l" indent="0" marL="0">
-              <a:lnSpc>
-                <a:spcPts val="1705"/>
-              </a:lnSpc>
-              <a:buNone/>
-            </a:pPr>
-            <a:r>
-              <a:rPr lang="en-US" sz="1100" dirty="0">
-                <a:solidFill>
-                  <a:srgbClr val="3A7D8C"/>
-                </a:solidFill>
-                <a:latin typeface="Noto Sans SC" pitchFamily="34" charset="0"/>
-                <a:ea typeface="Noto Sans SC" pitchFamily="34" charset="-122"/>
-                <a:cs typeface="Noto Sans SC" pitchFamily="34" charset="-120"/>
-              </a:rPr>
-              <a:t>wǔ</a:t>
-            </a:r>
-            <a:pPr algn="l" indent="0" marL="0">
-              <a:lnSpc>
-                <a:spcPts val="1705"/>
-              </a:lnSpc>
-              <a:buNone/>
-            </a:pPr>
-            <a:r>
-              <a:rPr lang="en-US" sz="1100" dirty="0">
-                <a:solidFill>
-                  <a:srgbClr val="1E2A38"/>
-                </a:solidFill>
-                <a:latin typeface="Noto Sans SC" pitchFamily="34" charset="0"/>
-                <a:ea typeface="Noto Sans SC" pitchFamily="34" charset="-122"/>
-                <a:cs typeface="Noto Sans SC" pitchFamily="34" charset="-120"/>
-              </a:rPr>
-              <a:t> </a:t>
-            </a:r>
-            <a:pPr algn="l" indent="0" marL="0">
-              <a:lnSpc>
-                <a:spcPts val="1705"/>
-              </a:lnSpc>
-              <a:buNone/>
-            </a:pPr>
-            <a:r>
-              <a:rPr lang="en-US" sz="1100" dirty="0">
-                <a:solidFill>
-                  <a:srgbClr val="8B94A3"/>
-                </a:solidFill>
-                <a:latin typeface="Noto Sans SC" pitchFamily="34" charset="0"/>
-                <a:ea typeface="Noto Sans SC" pitchFamily="34" charset="-122"/>
-                <a:cs typeface="Noto Sans SC" pitchFamily="34" charset="-120"/>
-              </a:rPr>
-              <a:t>— noon</a:t>
-            </a:r>
-            <a:pPr algn="l" indent="0" marL="0">
-              <a:lnSpc>
-                <a:spcPts val="1705"/>
-              </a:lnSpc>
-              <a:buNone/>
-            </a:pPr>
-            <a:r>
-              <a:rPr lang="en-US" sz="1100" dirty="0">
-                <a:solidFill>
-                  <a:srgbClr val="1E2A38"/>
-                </a:solidFill>
-                <a:latin typeface="Noto Sans SC" pitchFamily="34" charset="0"/>
-                <a:ea typeface="Noto Sans SC" pitchFamily="34" charset="-122"/>
-                <a:cs typeface="Noto Sans SC" pitchFamily="34" charset="-120"/>
-              </a:rPr>
-              <a:t> </a:t>
-            </a:r>
-            <a:pPr algn="l" indent="0" marL="0">
-              <a:lnSpc>
-                <a:spcPts val="1705"/>
-              </a:lnSpc>
-              <a:buNone/>
-            </a:pPr>
-            <a:r>
-              <a:rPr lang="en-US" sz="800" dirty="0">
-                <a:solidFill>
-                  <a:srgbClr val="3A7D8C"/>
-                </a:solidFill>
-                <a:latin typeface="Noto Sans SC" pitchFamily="34" charset="0"/>
-                <a:ea typeface="Noto Sans SC" pitchFamily="34" charset="-122"/>
-                <a:cs typeface="Noto Sans SC" pitchFamily="34" charset="-120"/>
-              </a:rPr>
-              <a:t>[部件字]</a:t>
-            </a:r>
-            <a:endParaRPr lang="en-US" sz="1100" dirty="0"/>
-          </a:p>
-          <a:p>
-            <a:pPr algn="l" indent="0" marL="0">
-              <a:lnSpc>
-                <a:spcPts val="1705"/>
-              </a:lnSpc>
-              <a:buNone/>
-            </a:pPr>
-            <a:r>
-              <a:rPr lang="en-US" sz="1300" b="1" dirty="0">
-                <a:solidFill>
-                  <a:srgbClr val="1E2A38"/>
-                </a:solidFill>
-                <a:latin typeface="Noto Sans SC" pitchFamily="34" charset="0"/>
-                <a:ea typeface="Noto Sans SC" pitchFamily="34" charset="-122"/>
-                <a:cs typeface="Noto Sans SC" pitchFamily="34" charset="-120"/>
-              </a:rPr>
-              <a:t>上午</a:t>
-            </a:r>
-            <a:pPr algn="l" indent="0" marL="0">
-              <a:lnSpc>
-                <a:spcPts val="1705"/>
-              </a:lnSpc>
-              <a:buNone/>
-            </a:pPr>
-            <a:r>
-              <a:rPr lang="en-US" sz="1100" dirty="0">
-                <a:solidFill>
-                  <a:srgbClr val="1E2A38"/>
-                </a:solidFill>
-                <a:latin typeface="Noto Sans SC" pitchFamily="34" charset="0"/>
-                <a:ea typeface="Noto Sans SC" pitchFamily="34" charset="-122"/>
-                <a:cs typeface="Noto Sans SC" pitchFamily="34" charset="-120"/>
-              </a:rPr>
-              <a:t> </a:t>
-            </a:r>
-            <a:pPr algn="l" indent="0" marL="0">
-              <a:lnSpc>
-                <a:spcPts val="1705"/>
-              </a:lnSpc>
-              <a:buNone/>
-            </a:pPr>
-            <a:r>
-              <a:rPr lang="en-US" sz="1100" dirty="0">
-                <a:solidFill>
-                  <a:srgbClr val="3A7D8C"/>
-                </a:solidFill>
-                <a:latin typeface="Noto Sans SC" pitchFamily="34" charset="0"/>
-                <a:ea typeface="Noto Sans SC" pitchFamily="34" charset="-122"/>
-                <a:cs typeface="Noto Sans SC" pitchFamily="34" charset="-120"/>
-              </a:rPr>
-              <a:t>shàng wǔ</a:t>
-            </a:r>
-            <a:pPr algn="l" indent="0" marL="0">
-              <a:lnSpc>
-                <a:spcPts val="1705"/>
-              </a:lnSpc>
-              <a:buNone/>
-            </a:pPr>
-            <a:r>
-              <a:rPr lang="en-US" sz="1100" dirty="0">
-                <a:solidFill>
-                  <a:srgbClr val="1E2A38"/>
-                </a:solidFill>
-                <a:latin typeface="Noto Sans SC" pitchFamily="34" charset="0"/>
-                <a:ea typeface="Noto Sans SC" pitchFamily="34" charset="-122"/>
-                <a:cs typeface="Noto Sans SC" pitchFamily="34" charset="-120"/>
-              </a:rPr>
-              <a:t> </a:t>
-            </a:r>
-            <a:pPr algn="l" indent="0" marL="0">
-              <a:lnSpc>
-                <a:spcPts val="1705"/>
-              </a:lnSpc>
-              <a:buNone/>
-            </a:pPr>
-            <a:r>
-              <a:rPr lang="en-US" sz="1100" dirty="0">
-                <a:solidFill>
-                  <a:srgbClr val="8B94A3"/>
-                </a:solidFill>
-                <a:latin typeface="Noto Sans SC" pitchFamily="34" charset="0"/>
-                <a:ea typeface="Noto Sans SC" pitchFamily="34" charset="-122"/>
-                <a:cs typeface="Noto Sans SC" pitchFamily="34" charset="-120"/>
-              </a:rPr>
-              <a:t>— before noon; morning</a:t>
-            </a:r>
-            <a:pPr algn="l" indent="0" marL="0">
-              <a:lnSpc>
-                <a:spcPts val="1705"/>
-              </a:lnSpc>
-              <a:buNone/>
-            </a:pPr>
-            <a:r>
-              <a:rPr lang="en-US" sz="1100" dirty="0">
-                <a:solidFill>
-                  <a:srgbClr val="1E2A38"/>
-                </a:solidFill>
-                <a:latin typeface="Noto Sans SC" pitchFamily="34" charset="0"/>
-                <a:ea typeface="Noto Sans SC" pitchFamily="34" charset="-122"/>
-                <a:cs typeface="Noto Sans SC" pitchFamily="34" charset="-120"/>
-              </a:rPr>
-              <a:t> </a:t>
-            </a:r>
-            <a:pPr algn="l" indent="0" marL="0">
-              <a:lnSpc>
-                <a:spcPts val="1705"/>
-              </a:lnSpc>
-              <a:buNone/>
-            </a:pPr>
-            <a:r>
-              <a:rPr lang="en-US" sz="800" dirty="0">
-                <a:solidFill>
-                  <a:srgbClr val="C8943E"/>
-                </a:solidFill>
-                <a:latin typeface="Noto Sans SC" pitchFamily="34" charset="0"/>
-                <a:ea typeface="Noto Sans SC" pitchFamily="34" charset="-122"/>
-                <a:cs typeface="Noto Sans SC" pitchFamily="34" charset="-120"/>
-              </a:rPr>
-              <a:t>[时间词]</a:t>
-            </a:r>
-            <a:endParaRPr lang="en-US" sz="1100" dirty="0"/>
-          </a:p>
-          <a:p>
-            <a:pPr algn="l" indent="0" marL="0">
-              <a:lnSpc>
-                <a:spcPts val="1705"/>
-              </a:lnSpc>
-              <a:buNone/>
-            </a:pPr>
-            <a:r>
-              <a:rPr lang="en-US" sz="1300" b="1" dirty="0">
-                <a:solidFill>
-                  <a:srgbClr val="1E2A38"/>
-                </a:solidFill>
-                <a:latin typeface="Noto Sans SC" pitchFamily="34" charset="0"/>
-                <a:ea typeface="Noto Sans SC" pitchFamily="34" charset="-122"/>
-                <a:cs typeface="Noto Sans SC" pitchFamily="34" charset="-120"/>
-              </a:rPr>
-              <a:t>中午</a:t>
-            </a:r>
-            <a:pPr algn="l" indent="0" marL="0">
-              <a:lnSpc>
-                <a:spcPts val="1705"/>
-              </a:lnSpc>
-              <a:buNone/>
-            </a:pPr>
-            <a:r>
-              <a:rPr lang="en-US" sz="1100" dirty="0">
-                <a:solidFill>
-                  <a:srgbClr val="1E2A38"/>
-                </a:solidFill>
-                <a:latin typeface="Noto Sans SC" pitchFamily="34" charset="0"/>
-                <a:ea typeface="Noto Sans SC" pitchFamily="34" charset="-122"/>
-                <a:cs typeface="Noto Sans SC" pitchFamily="34" charset="-120"/>
-              </a:rPr>
-              <a:t> </a:t>
-            </a:r>
-            <a:pPr algn="l" indent="0" marL="0">
-              <a:lnSpc>
-                <a:spcPts val="1705"/>
-              </a:lnSpc>
-              <a:buNone/>
-            </a:pPr>
-            <a:r>
-              <a:rPr lang="en-US" sz="1100" dirty="0">
-                <a:solidFill>
-                  <a:srgbClr val="3A7D8C"/>
-                </a:solidFill>
-                <a:latin typeface="Noto Sans SC" pitchFamily="34" charset="0"/>
-                <a:ea typeface="Noto Sans SC" pitchFamily="34" charset="-122"/>
-                <a:cs typeface="Noto Sans SC" pitchFamily="34" charset="-120"/>
-              </a:rPr>
-              <a:t>zhōng wǔ</a:t>
-            </a:r>
-            <a:pPr algn="l" indent="0" marL="0">
-              <a:lnSpc>
-                <a:spcPts val="1705"/>
-              </a:lnSpc>
-              <a:buNone/>
-            </a:pPr>
-            <a:r>
-              <a:rPr lang="en-US" sz="1100" dirty="0">
-                <a:solidFill>
-                  <a:srgbClr val="1E2A38"/>
-                </a:solidFill>
-                <a:latin typeface="Noto Sans SC" pitchFamily="34" charset="0"/>
-                <a:ea typeface="Noto Sans SC" pitchFamily="34" charset="-122"/>
-                <a:cs typeface="Noto Sans SC" pitchFamily="34" charset="-120"/>
-              </a:rPr>
-              <a:t> </a:t>
-            </a:r>
-            <a:pPr algn="l" indent="0" marL="0">
-              <a:lnSpc>
-                <a:spcPts val="1705"/>
-              </a:lnSpc>
-              <a:buNone/>
-            </a:pPr>
-            <a:r>
-              <a:rPr lang="en-US" sz="1100" dirty="0">
-                <a:solidFill>
-                  <a:srgbClr val="8B94A3"/>
-                </a:solidFill>
-                <a:latin typeface="Noto Sans SC" pitchFamily="34" charset="0"/>
-                <a:ea typeface="Noto Sans SC" pitchFamily="34" charset="-122"/>
-                <a:cs typeface="Noto Sans SC" pitchFamily="34" charset="-120"/>
-              </a:rPr>
-              <a:t>— noon</a:t>
-            </a:r>
-            <a:pPr algn="l" indent="0" marL="0">
-              <a:lnSpc>
-                <a:spcPts val="1705"/>
-              </a:lnSpc>
-              <a:buNone/>
-            </a:pPr>
-            <a:r>
-              <a:rPr lang="en-US" sz="1100" dirty="0">
-                <a:solidFill>
-                  <a:srgbClr val="1E2A38"/>
-                </a:solidFill>
-                <a:latin typeface="Noto Sans SC" pitchFamily="34" charset="0"/>
-                <a:ea typeface="Noto Sans SC" pitchFamily="34" charset="-122"/>
-                <a:cs typeface="Noto Sans SC" pitchFamily="34" charset="-120"/>
-              </a:rPr>
-              <a:t> </a:t>
-            </a:r>
-            <a:pPr algn="l" indent="0" marL="0">
-              <a:lnSpc>
-                <a:spcPts val="1705"/>
-              </a:lnSpc>
-              <a:buNone/>
-            </a:pPr>
-            <a:r>
-              <a:rPr lang="en-US" sz="800" dirty="0">
-                <a:solidFill>
-                  <a:srgbClr val="C8943E"/>
-                </a:solidFill>
-                <a:latin typeface="Noto Sans SC" pitchFamily="34" charset="0"/>
-                <a:ea typeface="Noto Sans SC" pitchFamily="34" charset="-122"/>
-                <a:cs typeface="Noto Sans SC" pitchFamily="34" charset="-120"/>
-              </a:rPr>
-              <a:t>[时间词]</a:t>
-            </a:r>
-            <a:endParaRPr lang="en-US" sz="1100" dirty="0"/>
-          </a:p>
-          <a:p>
-            <a:pPr algn="l" indent="0" marL="0">
-              <a:lnSpc>
-                <a:spcPts val="1705"/>
-              </a:lnSpc>
-              <a:buNone/>
-            </a:pPr>
-            <a:r>
-              <a:rPr lang="en-US" sz="1300" b="1" dirty="0">
-                <a:solidFill>
-                  <a:srgbClr val="1E2A38"/>
-                </a:solidFill>
-                <a:latin typeface="Noto Sans SC" pitchFamily="34" charset="0"/>
-                <a:ea typeface="Noto Sans SC" pitchFamily="34" charset="-122"/>
-                <a:cs typeface="Noto Sans SC" pitchFamily="34" charset="-120"/>
-              </a:rPr>
-              <a:t>下午</a:t>
-            </a:r>
-            <a:pPr algn="l" indent="0" marL="0">
-              <a:lnSpc>
-                <a:spcPts val="1705"/>
-              </a:lnSpc>
-              <a:buNone/>
-            </a:pPr>
-            <a:r>
-              <a:rPr lang="en-US" sz="1100" dirty="0">
-                <a:solidFill>
-                  <a:srgbClr val="1E2A38"/>
-                </a:solidFill>
-                <a:latin typeface="Noto Sans SC" pitchFamily="34" charset="0"/>
-                <a:ea typeface="Noto Sans SC" pitchFamily="34" charset="-122"/>
-                <a:cs typeface="Noto Sans SC" pitchFamily="34" charset="-120"/>
-              </a:rPr>
-              <a:t> </a:t>
-            </a:r>
-            <a:pPr algn="l" indent="0" marL="0">
-              <a:lnSpc>
-                <a:spcPts val="1705"/>
-              </a:lnSpc>
-              <a:buNone/>
-            </a:pPr>
-            <a:r>
-              <a:rPr lang="en-US" sz="1100" dirty="0">
-                <a:solidFill>
-                  <a:srgbClr val="3A7D8C"/>
-                </a:solidFill>
-                <a:latin typeface="Noto Sans SC" pitchFamily="34" charset="0"/>
-                <a:ea typeface="Noto Sans SC" pitchFamily="34" charset="-122"/>
-                <a:cs typeface="Noto Sans SC" pitchFamily="34" charset="-120"/>
-              </a:rPr>
-              <a:t>xià wǔ</a:t>
-            </a:r>
-            <a:pPr algn="l" indent="0" marL="0">
-              <a:lnSpc>
-                <a:spcPts val="1705"/>
-              </a:lnSpc>
-              <a:buNone/>
-            </a:pPr>
-            <a:r>
-              <a:rPr lang="en-US" sz="1100" dirty="0">
-                <a:solidFill>
-                  <a:srgbClr val="1E2A38"/>
-                </a:solidFill>
-                <a:latin typeface="Noto Sans SC" pitchFamily="34" charset="0"/>
-                <a:ea typeface="Noto Sans SC" pitchFamily="34" charset="-122"/>
-                <a:cs typeface="Noto Sans SC" pitchFamily="34" charset="-120"/>
-              </a:rPr>
-              <a:t> </a:t>
-            </a:r>
-            <a:pPr algn="l" indent="0" marL="0">
-              <a:lnSpc>
-                <a:spcPts val="1705"/>
-              </a:lnSpc>
-              <a:buNone/>
-            </a:pPr>
-            <a:r>
-              <a:rPr lang="en-US" sz="1100" dirty="0">
-                <a:solidFill>
-                  <a:srgbClr val="8B94A3"/>
-                </a:solidFill>
-                <a:latin typeface="Noto Sans SC" pitchFamily="34" charset="0"/>
-                <a:ea typeface="Noto Sans SC" pitchFamily="34" charset="-122"/>
-                <a:cs typeface="Noto Sans SC" pitchFamily="34" charset="-120"/>
-              </a:rPr>
-              <a:t>— afternoon</a:t>
-            </a:r>
-            <a:pPr algn="l" indent="0" marL="0">
-              <a:lnSpc>
-                <a:spcPts val="1705"/>
-              </a:lnSpc>
-              <a:buNone/>
-            </a:pPr>
-            <a:r>
-              <a:rPr lang="en-US" sz="1100" dirty="0">
-                <a:solidFill>
-                  <a:srgbClr val="1E2A38"/>
-                </a:solidFill>
-                <a:latin typeface="Noto Sans SC" pitchFamily="34" charset="0"/>
-                <a:ea typeface="Noto Sans SC" pitchFamily="34" charset="-122"/>
-                <a:cs typeface="Noto Sans SC" pitchFamily="34" charset="-120"/>
-              </a:rPr>
-              <a:t> </a:t>
-            </a:r>
-            <a:pPr algn="l" indent="0" marL="0">
-              <a:lnSpc>
-                <a:spcPts val="1705"/>
-              </a:lnSpc>
-              <a:buNone/>
-            </a:pPr>
-            <a:r>
-              <a:rPr lang="en-US" sz="800" dirty="0">
-                <a:solidFill>
-                  <a:srgbClr val="C8943E"/>
-                </a:solidFill>
-                <a:latin typeface="Noto Sans SC" pitchFamily="34" charset="0"/>
-                <a:ea typeface="Noto Sans SC" pitchFamily="34" charset="-122"/>
-                <a:cs typeface="Noto Sans SC" pitchFamily="34" charset="-120"/>
-              </a:rPr>
-              <a:t>[时间词]</a:t>
-            </a:r>
-            <a:endParaRPr lang="en-US" sz="1100" dirty="0"/>
-          </a:p>
-          <a:p>
-            <a:pPr algn="l" indent="0" marL="0">
-              <a:lnSpc>
-                <a:spcPts val="1705"/>
-              </a:lnSpc>
-              <a:buNone/>
-            </a:pPr>
-            <a:r>
-              <a:rPr lang="en-US" sz="1300" b="1" dirty="0">
-                <a:solidFill>
-                  <a:srgbClr val="1E2A38"/>
-                </a:solidFill>
-                <a:latin typeface="Noto Sans SC" pitchFamily="34" charset="0"/>
-                <a:ea typeface="Noto Sans SC" pitchFamily="34" charset="-122"/>
-                <a:cs typeface="Noto Sans SC" pitchFamily="34" charset="-120"/>
-              </a:rPr>
-              <a:t>晚上</a:t>
-            </a:r>
-            <a:pPr algn="l" indent="0" marL="0">
-              <a:lnSpc>
-                <a:spcPts val="1705"/>
-              </a:lnSpc>
-              <a:buNone/>
-            </a:pPr>
-            <a:r>
-              <a:rPr lang="en-US" sz="1100" dirty="0">
-                <a:solidFill>
-                  <a:srgbClr val="1E2A38"/>
-                </a:solidFill>
-                <a:latin typeface="Noto Sans SC" pitchFamily="34" charset="0"/>
-                <a:ea typeface="Noto Sans SC" pitchFamily="34" charset="-122"/>
-                <a:cs typeface="Noto Sans SC" pitchFamily="34" charset="-120"/>
-              </a:rPr>
-              <a:t> </a:t>
-            </a:r>
-            <a:pPr algn="l" indent="0" marL="0">
-              <a:lnSpc>
-                <a:spcPts val="1705"/>
-              </a:lnSpc>
-              <a:buNone/>
-            </a:pPr>
-            <a:r>
-              <a:rPr lang="en-US" sz="1100" dirty="0">
-                <a:solidFill>
-                  <a:srgbClr val="3A7D8C"/>
-                </a:solidFill>
-                <a:latin typeface="Noto Sans SC" pitchFamily="34" charset="0"/>
-                <a:ea typeface="Noto Sans SC" pitchFamily="34" charset="-122"/>
-                <a:cs typeface="Noto Sans SC" pitchFamily="34" charset="-120"/>
-              </a:rPr>
-              <a:t>wǎn shàng</a:t>
-            </a:r>
-            <a:pPr algn="l" indent="0" marL="0">
-              <a:lnSpc>
-                <a:spcPts val="1705"/>
-              </a:lnSpc>
-              <a:buNone/>
-            </a:pPr>
-            <a:r>
-              <a:rPr lang="en-US" sz="1100" dirty="0">
-                <a:solidFill>
-                  <a:srgbClr val="1E2A38"/>
-                </a:solidFill>
-                <a:latin typeface="Noto Sans SC" pitchFamily="34" charset="0"/>
-                <a:ea typeface="Noto Sans SC" pitchFamily="34" charset="-122"/>
-                <a:cs typeface="Noto Sans SC" pitchFamily="34" charset="-120"/>
-              </a:rPr>
-              <a:t> </a:t>
-            </a:r>
-            <a:pPr algn="l" indent="0" marL="0">
-              <a:lnSpc>
-                <a:spcPts val="1705"/>
-              </a:lnSpc>
-              <a:buNone/>
-            </a:pPr>
-            <a:r>
-              <a:rPr lang="en-US" sz="1100" dirty="0">
-                <a:solidFill>
-                  <a:srgbClr val="8B94A3"/>
-                </a:solidFill>
-                <a:latin typeface="Noto Sans SC" pitchFamily="34" charset="0"/>
-                <a:ea typeface="Noto Sans SC" pitchFamily="34" charset="-122"/>
-                <a:cs typeface="Noto Sans SC" pitchFamily="34" charset="-120"/>
-              </a:rPr>
-              <a:t>— (in the) evening</a:t>
-            </a:r>
-            <a:pPr algn="l" indent="0" marL="0">
-              <a:lnSpc>
-                <a:spcPts val="1705"/>
-              </a:lnSpc>
-              <a:buNone/>
-            </a:pPr>
-            <a:r>
-              <a:rPr lang="en-US" sz="1100" dirty="0">
-                <a:solidFill>
-                  <a:srgbClr val="1E2A38"/>
-                </a:solidFill>
-                <a:latin typeface="Noto Sans SC" pitchFamily="34" charset="0"/>
-                <a:ea typeface="Noto Sans SC" pitchFamily="34" charset="-122"/>
-                <a:cs typeface="Noto Sans SC" pitchFamily="34" charset="-120"/>
-              </a:rPr>
-              <a:t> </a:t>
-            </a:r>
-            <a:pPr algn="l" indent="0" marL="0">
-              <a:lnSpc>
-                <a:spcPts val="1705"/>
-              </a:lnSpc>
-              <a:buNone/>
-            </a:pPr>
-            <a:r>
-              <a:rPr lang="en-US" sz="800" dirty="0">
-                <a:solidFill>
-                  <a:srgbClr val="C8943E"/>
-                </a:solidFill>
-                <a:latin typeface="Noto Sans SC" pitchFamily="34" charset="0"/>
-                <a:ea typeface="Noto Sans SC" pitchFamily="34" charset="-122"/>
-                <a:cs typeface="Noto Sans SC" pitchFamily="34" charset="-120"/>
-              </a:rPr>
-              <a:t>[时间词]</a:t>
-            </a:r>
-            <a:endParaRPr lang="en-US" sz="1100" dirty="0"/>
-          </a:p>
-          <a:p>
-            <a:pPr algn="l" indent="0" marL="0">
-              <a:lnSpc>
-                <a:spcPts val="1705"/>
-              </a:lnSpc>
-              <a:buNone/>
-            </a:pPr>
-            <a:r>
-              <a:rPr lang="en-US" sz="1300" b="1" dirty="0">
-                <a:solidFill>
-                  <a:srgbClr val="1E2A38"/>
-                </a:solidFill>
-                <a:latin typeface="Noto Sans SC" pitchFamily="34" charset="0"/>
-                <a:ea typeface="Noto Sans SC" pitchFamily="34" charset="-122"/>
-                <a:cs typeface="Noto Sans SC" pitchFamily="34" charset="-120"/>
-              </a:rPr>
-              <a:t>下</a:t>
-            </a:r>
-            <a:pPr algn="l" indent="0" marL="0">
-              <a:lnSpc>
-                <a:spcPts val="1705"/>
-              </a:lnSpc>
-              <a:buNone/>
-            </a:pPr>
-            <a:r>
-              <a:rPr lang="en-US" sz="1100" dirty="0">
-                <a:solidFill>
-                  <a:srgbClr val="1E2A38"/>
-                </a:solidFill>
-                <a:latin typeface="Noto Sans SC" pitchFamily="34" charset="0"/>
-                <a:ea typeface="Noto Sans SC" pitchFamily="34" charset="-122"/>
-                <a:cs typeface="Noto Sans SC" pitchFamily="34" charset="-120"/>
-              </a:rPr>
-              <a:t> </a:t>
-            </a:r>
-            <a:pPr algn="l" indent="0" marL="0">
-              <a:lnSpc>
-                <a:spcPts val="1705"/>
-              </a:lnSpc>
-              <a:buNone/>
-            </a:pPr>
-            <a:r>
-              <a:rPr lang="en-US" sz="1100" dirty="0">
-                <a:solidFill>
-                  <a:srgbClr val="3A7D8C"/>
-                </a:solidFill>
-                <a:latin typeface="Noto Sans SC" pitchFamily="34" charset="0"/>
-                <a:ea typeface="Noto Sans SC" pitchFamily="34" charset="-122"/>
-                <a:cs typeface="Noto Sans SC" pitchFamily="34" charset="-120"/>
-              </a:rPr>
-              <a:t>xià</a:t>
-            </a:r>
-            <a:pPr algn="l" indent="0" marL="0">
-              <a:lnSpc>
-                <a:spcPts val="1705"/>
-              </a:lnSpc>
-              <a:buNone/>
-            </a:pPr>
-            <a:r>
-              <a:rPr lang="en-US" sz="1100" dirty="0">
-                <a:solidFill>
-                  <a:srgbClr val="1E2A38"/>
-                </a:solidFill>
-                <a:latin typeface="Noto Sans SC" pitchFamily="34" charset="0"/>
-                <a:ea typeface="Noto Sans SC" pitchFamily="34" charset="-122"/>
-                <a:cs typeface="Noto Sans SC" pitchFamily="34" charset="-120"/>
-              </a:rPr>
-              <a:t> </a:t>
-            </a:r>
-            <a:pPr algn="l" indent="0" marL="0">
-              <a:lnSpc>
-                <a:spcPts val="1705"/>
-              </a:lnSpc>
-              <a:buNone/>
-            </a:pPr>
-            <a:r>
-              <a:rPr lang="en-US" sz="1100" dirty="0">
-                <a:solidFill>
-                  <a:srgbClr val="8B94A3"/>
-                </a:solidFill>
-                <a:latin typeface="Noto Sans SC" pitchFamily="34" charset="0"/>
-                <a:ea typeface="Noto Sans SC" pitchFamily="34" charset="-122"/>
-                <a:cs typeface="Noto Sans SC" pitchFamily="34" charset="-120"/>
-              </a:rPr>
-              <a:t>— down; get off</a:t>
-            </a:r>
-            <a:pPr algn="l" indent="0" marL="0">
-              <a:lnSpc>
-                <a:spcPts val="1705"/>
-              </a:lnSpc>
-              <a:buNone/>
-            </a:pPr>
-            <a:r>
-              <a:rPr lang="en-US" sz="1100" dirty="0">
-                <a:solidFill>
-                  <a:srgbClr val="1E2A38"/>
-                </a:solidFill>
-                <a:latin typeface="Noto Sans SC" pitchFamily="34" charset="0"/>
-                <a:ea typeface="Noto Sans SC" pitchFamily="34" charset="-122"/>
-                <a:cs typeface="Noto Sans SC" pitchFamily="34" charset="-120"/>
-              </a:rPr>
-              <a:t> </a:t>
-            </a:r>
-            <a:pPr algn="l" indent="0" marL="0">
-              <a:lnSpc>
-                <a:spcPts val="1705"/>
-              </a:lnSpc>
-              <a:buNone/>
-            </a:pPr>
-            <a:r>
-              <a:rPr lang="en-US" sz="800" dirty="0">
-                <a:solidFill>
-                  <a:srgbClr val="3A7D8C"/>
-                </a:solidFill>
-                <a:latin typeface="Noto Sans SC" pitchFamily="34" charset="0"/>
-                <a:ea typeface="Noto Sans SC" pitchFamily="34" charset="-122"/>
-                <a:cs typeface="Noto Sans SC" pitchFamily="34" charset="-120"/>
-              </a:rPr>
-              <a:t>[部件字]</a:t>
-            </a:r>
-            <a:endParaRPr lang="en-US" sz="1100" dirty="0"/>
-          </a:p>
-          <a:p>
-            <a:pPr algn="l" indent="0" marL="0">
-              <a:lnSpc>
-                <a:spcPts val="1705"/>
-              </a:lnSpc>
-              <a:buNone/>
-            </a:pPr>
-            <a:r>
-              <a:rPr lang="en-US" sz="1300" b="1" dirty="0">
-                <a:solidFill>
-                  <a:srgbClr val="1E2A38"/>
-                </a:solidFill>
-                <a:latin typeface="Noto Sans SC" pitchFamily="34" charset="0"/>
-                <a:ea typeface="Noto Sans SC" pitchFamily="34" charset="-122"/>
-                <a:cs typeface="Noto Sans SC" pitchFamily="34" charset="-120"/>
-              </a:rPr>
-              <a:t>晚</a:t>
-            </a:r>
-            <a:pPr algn="l" indent="0" marL="0">
-              <a:lnSpc>
-                <a:spcPts val="1705"/>
-              </a:lnSpc>
-              <a:buNone/>
-            </a:pPr>
-            <a:r>
-              <a:rPr lang="en-US" sz="1100" dirty="0">
-                <a:solidFill>
-                  <a:srgbClr val="1E2A38"/>
-                </a:solidFill>
-                <a:latin typeface="Noto Sans SC" pitchFamily="34" charset="0"/>
-                <a:ea typeface="Noto Sans SC" pitchFamily="34" charset="-122"/>
-                <a:cs typeface="Noto Sans SC" pitchFamily="34" charset="-120"/>
-              </a:rPr>
-              <a:t> </a:t>
-            </a:r>
-            <a:pPr algn="l" indent="0" marL="0">
-              <a:lnSpc>
-                <a:spcPts val="1705"/>
-              </a:lnSpc>
-              <a:buNone/>
-            </a:pPr>
-            <a:r>
-              <a:rPr lang="en-US" sz="1100" dirty="0">
-                <a:solidFill>
-                  <a:srgbClr val="3A7D8C"/>
-                </a:solidFill>
-                <a:latin typeface="Noto Sans SC" pitchFamily="34" charset="0"/>
-                <a:ea typeface="Noto Sans SC" pitchFamily="34" charset="-122"/>
-                <a:cs typeface="Noto Sans SC" pitchFamily="34" charset="-120"/>
-              </a:rPr>
-              <a:t>wǎn</a:t>
-            </a:r>
-            <a:pPr algn="l" indent="0" marL="0">
-              <a:lnSpc>
-                <a:spcPts val="1705"/>
-              </a:lnSpc>
-              <a:buNone/>
-            </a:pPr>
-            <a:r>
-              <a:rPr lang="en-US" sz="1100" dirty="0">
-                <a:solidFill>
-                  <a:srgbClr val="1E2A38"/>
-                </a:solidFill>
-                <a:latin typeface="Noto Sans SC" pitchFamily="34" charset="0"/>
-                <a:ea typeface="Noto Sans SC" pitchFamily="34" charset="-122"/>
-                <a:cs typeface="Noto Sans SC" pitchFamily="34" charset="-120"/>
-              </a:rPr>
-              <a:t> </a:t>
-            </a:r>
-            <a:pPr algn="l" indent="0" marL="0">
-              <a:lnSpc>
-                <a:spcPts val="1705"/>
-              </a:lnSpc>
-              <a:buNone/>
-            </a:pPr>
-            <a:r>
-              <a:rPr lang="en-US" sz="1100" dirty="0">
-                <a:solidFill>
-                  <a:srgbClr val="8B94A3"/>
-                </a:solidFill>
-                <a:latin typeface="Noto Sans SC" pitchFamily="34" charset="0"/>
-                <a:ea typeface="Noto Sans SC" pitchFamily="34" charset="-122"/>
-                <a:cs typeface="Noto Sans SC" pitchFamily="34" charset="-120"/>
-              </a:rPr>
-              <a:t>— evening; late</a:t>
-            </a:r>
-            <a:pPr algn="l" indent="0" marL="0">
-              <a:lnSpc>
-                <a:spcPts val="1705"/>
-              </a:lnSpc>
-              <a:buNone/>
-            </a:pPr>
-            <a:r>
-              <a:rPr lang="en-US" sz="1100" dirty="0">
-                <a:solidFill>
-                  <a:srgbClr val="1E2A38"/>
-                </a:solidFill>
-                <a:latin typeface="Noto Sans SC" pitchFamily="34" charset="0"/>
-                <a:ea typeface="Noto Sans SC" pitchFamily="34" charset="-122"/>
-                <a:cs typeface="Noto Sans SC" pitchFamily="34" charset="-120"/>
-              </a:rPr>
-              <a:t> </a:t>
-            </a:r>
-            <a:pPr algn="l" indent="0" marL="0">
-              <a:lnSpc>
-                <a:spcPts val="1705"/>
-              </a:lnSpc>
-              <a:buNone/>
-            </a:pPr>
             <a:r>
               <a:rPr lang="en-US" sz="800" dirty="0">
                 <a:solidFill>
@@ -13408,6 +12970,64 @@
               </a:rPr>
               <a:t>早上</a:t>
             </a:r>
+            <a:r>
+              <a:rPr lang="en-US" sz="1050" dirty="0">
+                <a:solidFill>
+                  <a:srgbClr val="5B6677"/>
+                </a:solidFill>
+                <a:latin typeface="Noto Sans SC" pitchFamily="34" charset="0"/>
+                <a:ea typeface="Noto Sans SC" pitchFamily="34" charset="-122"/>
+                <a:cs typeface="Noto Sans SC" pitchFamily="34" charset="-120"/>
+              </a:rPr>
+              <a:t> </a:t>
+            </a:r>
+            <a:r>
+              <a:rPr lang="en-US" sz="1050" dirty="0">
+                <a:solidFill>
+                  <a:srgbClr val="5B6677"/>
+                </a:solidFill>
+                <a:latin typeface="Noto Sans SC" pitchFamily="34" charset="0"/>
+                <a:ea typeface="Noto Sans SC" pitchFamily="34" charset="-122"/>
+                <a:cs typeface="Noto Sans SC" pitchFamily="34" charset="-120"/>
+              </a:rPr>
+              <a:t>5:00–8:00</a:t>
+            </a:r>
+            <a:r>
+              <a:rPr lang="en-US" sz="1050" dirty="0">
+                <a:solidFill>
+                  <a:srgbClr val="5B6677"/>
+                </a:solidFill>
+                <a:latin typeface="Noto Sans SC" pitchFamily="34" charset="0"/>
+                <a:ea typeface="Noto Sans SC" pitchFamily="34" charset="-122"/>
+                <a:cs typeface="Noto Sans SC" pitchFamily="34" charset="-120"/>
+              </a:rPr>
+              <a:t> — </a:t>
+            </a:r>
+            <a:r>
+              <a:rPr lang="en-US" sz="1050" b="1" dirty="0">
+                <a:solidFill>
+                  <a:srgbClr val="C8943E"/>
+                </a:solidFill>
+                <a:latin typeface="Noto Sans SC" pitchFamily="34" charset="0"/>
+                <a:ea typeface="Noto Sans SC" pitchFamily="34" charset="-122"/>
+                <a:cs typeface="Noto Sans SC" pitchFamily="34" charset="-120"/>
+              </a:rPr>
+              <a:t>早上七点</a:t>
+            </a:r>
+            <a:r>
+              <a:rPr lang="en-US" sz="1050" dirty="0">
+                <a:solidFill>
+                  <a:srgbClr val="5B6677"/>
+                </a:solidFill>
+                <a:latin typeface="Noto Sans SC" pitchFamily="34" charset="0"/>
+                <a:ea typeface="Noto Sans SC" pitchFamily="34" charset="-122"/>
+                <a:cs typeface="Noto Sans SC" pitchFamily="34" charset="-120"/>
+              </a:rPr>
+              <a:t> — going to school 去上学</a:t>
+            </a:r>
+            <a:endParaRPr lang="en-US" sz="1050" dirty="0"/>
+          </a:p>
+          <a:p>
             <a:pPr algn="l" indent="0" marL="0">
               <a:lnSpc>
                 <a:spcPts val="1575"/>
@@ -13415,6 +13035,17 @@
               <a:buNone/>
             </a:pPr>
             <a:r>
+              <a:rPr lang="en-US" sz="1050" b="1" dirty="0">
+                <a:solidFill>
+                  <a:srgbClr val="1E2A38"/>
+                </a:solidFill>
+                <a:latin typeface="Noto Sans SC" pitchFamily="34" charset="0"/>
+                <a:ea typeface="Noto Sans SC" pitchFamily="34" charset="-122"/>
+                <a:cs typeface="Noto Sans SC" pitchFamily="34" charset="-120"/>
+              </a:rPr>
+              <a:t>上午</a:t>
+            </a:r>
+            <a:r>
               <a:rPr lang="en-US" sz="1050" dirty="0">
                 <a:solidFill>
                   <a:srgbClr val="5B6677"/>
@@ -13425,6 +13056,53 @@
               </a:rPr>
               <a:t> </a:t>
             </a:r>
+            <a:r>
+              <a:rPr lang="en-US" sz="1050" dirty="0">
+                <a:solidFill>
+                  <a:srgbClr val="5B6677"/>
+                </a:solidFill>
+                <a:latin typeface="Noto Sans SC" pitchFamily="34" charset="0"/>
+                <a:ea typeface="Noto Sans SC" pitchFamily="34" charset="-122"/>
+                <a:cs typeface="Noto Sans SC" pitchFamily="34" charset="-120"/>
+              </a:rPr>
+              <a:t>before noon</a:t>
+            </a:r>
+            <a:r>
+              <a:rPr lang="en-US" sz="1050" dirty="0">
+                <a:solidFill>
+                  <a:srgbClr val="5B6677"/>
+                </a:solidFill>
+                <a:latin typeface="Noto Sans SC" pitchFamily="34" charset="0"/>
+                <a:ea typeface="Noto Sans SC" pitchFamily="34" charset="-122"/>
+                <a:cs typeface="Noto Sans SC" pitchFamily="34" charset="-120"/>
+              </a:rPr>
+              <a:t> — </a:t>
+            </a:r>
+            <a:r>
+              <a:rPr lang="en-US" sz="1050" b="1" dirty="0">
+                <a:solidFill>
+                  <a:srgbClr val="C8943E"/>
+                </a:solidFill>
+                <a:latin typeface="Noto Sans SC" pitchFamily="34" charset="0"/>
+                <a:ea typeface="Noto Sans SC" pitchFamily="34" charset="-122"/>
+                <a:cs typeface="Noto Sans SC" pitchFamily="34" charset="-120"/>
+              </a:rPr>
+              <a:t>上午十点</a:t>
+            </a:r>
+            <a:r>
+              <a:rPr lang="en-US" sz="1050" dirty="0">
+                <a:solidFill>
+                  <a:srgbClr val="5B6677"/>
+                </a:solidFill>
+                <a:latin typeface="Noto Sans SC" pitchFamily="34" charset="0"/>
+                <a:ea typeface="Noto Sans SC" pitchFamily="34" charset="-122"/>
+                <a:cs typeface="Noto Sans SC" pitchFamily="34" charset="-120"/>
+              </a:rPr>
+              <a:t> — studying 学习</a:t>
+            </a:r>
+            <a:endParaRPr lang="en-US" sz="1050" dirty="0"/>
+          </a:p>
+          <a:p>
             <a:pPr algn="l" indent="0" marL="0">
               <a:lnSpc>
                 <a:spcPts val="1575"/>
@@ -13432,6 +13110,17 @@
               <a:buNone/>
             </a:pPr>
             <a:r>
+              <a:rPr lang="en-US" sz="1050" b="1" dirty="0">
+                <a:solidFill>
+                  <a:srgbClr val="1E2A38"/>
+                </a:solidFill>
+                <a:latin typeface="Noto Sans SC" pitchFamily="34" charset="0"/>
+                <a:ea typeface="Noto Sans SC" pitchFamily="34" charset="-122"/>
+                <a:cs typeface="Noto Sans SC" pitchFamily="34" charset="-120"/>
+              </a:rPr>
+              <a:t>中午</a:t>
+            </a:r>
+            <a:r>
               <a:rPr lang="en-US" sz="1050" dirty="0">
                 <a:solidFill>
                   <a:srgbClr val="5B6677"/>
@@ -13440,8 +13129,55 @@
                 <a:ea typeface="Noto Sans SC" pitchFamily="34" charset="-122"/>
                 <a:cs typeface="Noto Sans SC" pitchFamily="34" charset="-120"/>
               </a:rPr>
-              <a:t>5:00–8:00</a:t>
-            </a:r>
+              <a:t> </a:t>
+            </a:r>
+            <a:r>
+              <a:rPr lang="en-US" sz="1050" dirty="0">
+                <a:solidFill>
+                  <a:srgbClr val="5B6677"/>
+                </a:solidFill>
+                <a:latin typeface="Noto Sans SC" pitchFamily="34" charset="0"/>
+                <a:ea typeface="Noto Sans SC" pitchFamily="34" charset="-122"/>
+                <a:cs typeface="Noto Sans SC" pitchFamily="34" charset="-120"/>
+              </a:rPr>
+              <a:t>noon</a:t>
+            </a:r>
+            <a:r>
+              <a:rPr lang="en-US" sz="1050" dirty="0">
+                <a:solidFill>
+                  <a:srgbClr val="5B6677"/>
+                </a:solidFill>
+                <a:latin typeface="Noto Sans SC" pitchFamily="34" charset="0"/>
+                <a:ea typeface="Noto Sans SC" pitchFamily="34" charset="-122"/>
+                <a:cs typeface="Noto Sans SC" pitchFamily="34" charset="-120"/>
+              </a:rPr>
+              <a:t> — </a:t>
+            </a:r>
+            <a:r>
+              <a:rPr lang="en-US" sz="1050" b="1" dirty="0">
+                <a:solidFill>
+                  <a:srgbClr val="C8943E"/>
+                </a:solidFill>
+                <a:latin typeface="Noto Sans SC" pitchFamily="34" charset="0"/>
+                <a:ea typeface="Noto Sans SC" pitchFamily="34" charset="-122"/>
+                <a:cs typeface="Noto Sans SC" pitchFamily="34" charset="-120"/>
+              </a:rPr>
+              <a:t>中午十二点</a:t>
+            </a:r>
+            <a:r>
+              <a:rPr lang="en-US" sz="1050" dirty="0">
+                <a:solidFill>
+                  <a:srgbClr val="5B6677"/>
+                </a:solidFill>
+                <a:latin typeface="Noto Sans SC" pitchFamily="34" charset="0"/>
+                <a:ea typeface="Noto Sans SC" pitchFamily="34" charset="-122"/>
+                <a:cs typeface="Noto Sans SC" pitchFamily="34" charset="-120"/>
+              </a:rPr>
+              <a:t> — eating 吃饭</a:t>
+            </a:r>
+            <a:endParaRPr lang="en-US" sz="1050" dirty="0"/>
+          </a:p>
+          <a:p>
             <a:pPr algn="l" indent="0" marL="0">
               <a:lnSpc>
                 <a:spcPts val="1575"/>
@@ -13449,6 +13185,17 @@
               <a:buNone/>
             </a:pPr>
             <a:r>
+              <a:rPr lang="en-US" sz="1050" b="1" dirty="0">
+                <a:solidFill>
+                  <a:srgbClr val="1E2A38"/>
+                </a:solidFill>
+                <a:latin typeface="Noto Sans SC" pitchFamily="34" charset="0"/>
+                <a:ea typeface="Noto Sans SC" pitchFamily="34" charset="-122"/>
+                <a:cs typeface="Noto Sans SC" pitchFamily="34" charset="-120"/>
+              </a:rPr>
+              <a:t>下午</a:t>
+            </a:r>
+            <a:r>
               <a:rPr lang="en-US" sz="1050" dirty="0">
                 <a:solidFill>
                   <a:srgbClr val="5B6677"/>
@@ -13457,8 +13204,55 @@
                 <a:ea typeface="Noto Sans SC" pitchFamily="34" charset="-122"/>
                 <a:cs typeface="Noto Sans SC" pitchFamily="34" charset="-120"/>
               </a:rPr>
+              <a:t> </a:t>
+            </a:r>
+            <a:r>
+              <a:rPr lang="en-US" sz="1050" dirty="0">
+                <a:solidFill>
+                  <a:srgbClr val="5B6677"/>
+                </a:solidFill>
+                <a:latin typeface="Noto Sans SC" pitchFamily="34" charset="0"/>
+                <a:ea typeface="Noto Sans SC" pitchFamily="34" charset="-122"/>
+                <a:cs typeface="Noto Sans SC" pitchFamily="34" charset="-120"/>
+              </a:rPr>
+              <a:t>afternoon</a:t>
+            </a:r>
+            <a:r>
+              <a:rPr lang="en-US" sz="1050" dirty="0">
+                <a:solidFill>
+                  <a:srgbClr val="5B6677"/>
+                </a:solidFill>
+                <a:latin typeface="Noto Sans SC" pitchFamily="34" charset="0"/>
+                <a:ea typeface="Noto Sans SC" pitchFamily="34" charset="-122"/>
+                <a:cs typeface="Noto Sans SC" pitchFamily="34" charset="-120"/>
+              </a:rPr>
               <a:t> — </a:t>
             </a:r>
+            <a:r>
+              <a:rPr lang="en-US" sz="1050" b="1" dirty="0">
+                <a:solidFill>
+                  <a:srgbClr val="C8943E"/>
+                </a:solidFill>
+                <a:latin typeface="Noto Sans SC" pitchFamily="34" charset="0"/>
+                <a:ea typeface="Noto Sans SC" pitchFamily="34" charset="-122"/>
+                <a:cs typeface="Noto Sans SC" pitchFamily="34" charset="-120"/>
+              </a:rPr>
+              <a:t>下午四点</a:t>
+            </a:r>
+            <a:r>
+              <a:rPr lang="en-US" sz="1050" dirty="0">
+                <a:solidFill>
+                  <a:srgbClr val="5B6677"/>
+                </a:solidFill>
+                <a:latin typeface="Noto Sans SC" pitchFamily="34" charset="0"/>
+                <a:ea typeface="Noto Sans SC" pitchFamily="34" charset="-122"/>
+                <a:cs typeface="Noto Sans SC" pitchFamily="34" charset="-120"/>
+              </a:rPr>
+              <a:t> — playing football 踢足球</a:t>
+            </a:r>
+            <a:endParaRPr lang="en-US" sz="1050" dirty="0"/>
+          </a:p>
+          <a:p>
             <a:pPr algn="l" indent="0" marL="0">
               <a:lnSpc>
                 <a:spcPts val="1575"/>
@@ -13468,440 +13262,58 @@
             <a:r>
               <a:rPr lang="en-US" sz="1050" b="1" dirty="0">
                 <a:solidFill>
+                  <a:srgbClr val="1E2A38"/>
+                </a:solidFill>
+                <a:latin typeface="Noto Sans SC" pitchFamily="34" charset="0"/>
+                <a:ea typeface="Noto Sans SC" pitchFamily="34" charset="-122"/>
+                <a:cs typeface="Noto Sans SC" pitchFamily="34" charset="-120"/>
+              </a:rPr>
+              <a:t>晚上</a:t>
+            </a:r>
+            <a:r>
+              <a:rPr lang="en-US" sz="1050" dirty="0">
+                <a:solidFill>
+                  <a:srgbClr val="5B6677"/>
+                </a:solidFill>
+                <a:latin typeface="Noto Sans SC" pitchFamily="34" charset="0"/>
+                <a:ea typeface="Noto Sans SC" pitchFamily="34" charset="-122"/>
+                <a:cs typeface="Noto Sans SC" pitchFamily="34" charset="-120"/>
+              </a:rPr>
+              <a:t> </a:t>
+            </a:r>
+            <a:r>
+              <a:rPr lang="en-US" sz="1050" dirty="0">
+                <a:solidFill>
+                  <a:srgbClr val="5B6677"/>
+                </a:solidFill>
+                <a:latin typeface="Noto Sans SC" pitchFamily="34" charset="0"/>
+                <a:ea typeface="Noto Sans SC" pitchFamily="34" charset="-122"/>
+                <a:cs typeface="Noto Sans SC" pitchFamily="34" charset="-120"/>
+              </a:rPr>
+              <a:t>18:00–24:00</a:t>
+            </a:r>
+            <a:r>
+              <a:rPr lang="en-US" sz="1050" dirty="0">
+                <a:solidFill>
+                  <a:srgbClr val="5B6677"/>
+                </a:solidFill>
+                <a:latin typeface="Noto Sans SC" pitchFamily="34" charset="0"/>
+                <a:ea typeface="Noto Sans SC" pitchFamily="34" charset="-122"/>
+                <a:cs typeface="Noto Sans SC" pitchFamily="34" charset="-120"/>
+              </a:rPr>
+              <a:t> — </a:t>
+            </a:r>
+            <a:r>
+              <a:rPr lang="en-US" sz="1050" b="1" dirty="0">
+                <a:solidFill>
                   <a:srgbClr val="C8943E"/>
                 </a:solidFill>
                 <a:latin typeface="Noto Sans SC" pitchFamily="34" charset="0"/>
                 <a:ea typeface="Noto Sans SC" pitchFamily="34" charset="-122"/>
                 <a:cs typeface="Noto Sans SC" pitchFamily="34" charset="-120"/>
               </a:rPr>
-              <a:t>早上七点</a:t>
-            </a:r>
-            <a:pPr algn="l" indent="0" marL="0">
-              <a:lnSpc>
-                <a:spcPts val="1575"/>
-              </a:lnSpc>
-              <a:buNone/>
-            </a:pPr>
-            <a:r>
-              <a:rPr lang="en-US" sz="1050" dirty="0">
-                <a:solidFill>
-                  <a:srgbClr val="5B6677"/>
-                </a:solidFill>
-                <a:latin typeface="Noto Sans SC" pitchFamily="34" charset="0"/>
-                <a:ea typeface="Noto Sans SC" pitchFamily="34" charset="-122"/>
-                <a:cs typeface="Noto Sans SC" pitchFamily="34" charset="-120"/>
-              </a:rPr>
-              <a:t> — going to school 去上学</a:t>
-            </a:r>
-            <a:endParaRPr lang="en-US" sz="1050" dirty="0"/>
-          </a:p>
-          <a:p>
-            <a:pPr algn="l" indent="0" marL="0">
-              <a:lnSpc>
-                <a:spcPts val="1575"/>
-              </a:lnSpc>
-              <a:buNone/>
-            </a:pPr>
-            <a:r>
-              <a:rPr lang="en-US" sz="1050" b="1" dirty="0">
-                <a:solidFill>
-                  <a:srgbClr val="1E2A38"/>
-                </a:solidFill>
-                <a:latin typeface="Noto Sans SC" pitchFamily="34" charset="0"/>
-                <a:ea typeface="Noto Sans SC" pitchFamily="34" charset="-122"/>
-                <a:cs typeface="Noto Sans SC" pitchFamily="34" charset="-120"/>
-              </a:rPr>
-              <a:t>上午</a:t>
-            </a:r>
-            <a:pPr algn="l" indent="0" marL="0">
-              <a:lnSpc>
-                <a:spcPts val="1575"/>
-              </a:lnSpc>
-              <a:buNone/>
-            </a:pPr>
-            <a:r>
-              <a:rPr lang="en-US" sz="1050" dirty="0">
-                <a:solidFill>
-                  <a:srgbClr val="5B6677"/>
-                </a:solidFill>
-                <a:latin typeface="Noto Sans SC" pitchFamily="34" charset="0"/>
-                <a:ea typeface="Noto Sans SC" pitchFamily="34" charset="-122"/>
-                <a:cs typeface="Noto Sans SC" pitchFamily="34" charset="-120"/>
-              </a:rPr>
-              <a:t> </a:t>
-            </a:r>
-            <a:pPr algn="l" indent="0" marL="0">
-              <a:lnSpc>
-                <a:spcPts val="1575"/>
-              </a:lnSpc>
-              <a:buNone/>
-            </a:pPr>
-            <a:r>
-              <a:rPr lang="en-US" sz="1050" dirty="0">
-                <a:solidFill>
-                  <a:srgbClr val="5B6677"/>
-                </a:solidFill>
-                <a:latin typeface="Noto Sans SC" pitchFamily="34" charset="0"/>
-                <a:ea typeface="Noto Sans SC" pitchFamily="34" charset="-122"/>
-                <a:cs typeface="Noto Sans SC" pitchFamily="34" charset="-120"/>
-              </a:rPr>
-              <a:t>before noon</a:t>
-            </a:r>
-            <a:pPr algn="l" indent="0" marL="0">
-              <a:lnSpc>
-                <a:spcPts val="1575"/>
-              </a:lnSpc>
-              <a:buNone/>
-            </a:pPr>
-            <a:r>
-              <a:rPr lang="en-US" sz="1050" dirty="0">
-                <a:solidFill>
-                  <a:srgbClr val="5B6677"/>
-                </a:solidFill>
-                <a:latin typeface="Noto Sans SC" pitchFamily="34" charset="0"/>
-                <a:ea typeface="Noto Sans SC" pitchFamily="34" charset="-122"/>
-                <a:cs typeface="Noto Sans SC" pitchFamily="34" charset="-120"/>
-              </a:rPr>
-              <a:t> — </a:t>
-            </a:r>
-            <a:pPr algn="l" indent="0" marL="0">
-              <a:lnSpc>
-                <a:spcPts val="1575"/>
-              </a:lnSpc>
-              <a:buNone/>
-            </a:pPr>
-            <a:r>
-              <a:rPr lang="en-US" sz="1050" b="1" dirty="0">
-                <a:solidFill>
-                  <a:srgbClr val="C8943E"/>
-                </a:solidFill>
-                <a:latin typeface="Noto Sans SC" pitchFamily="34" charset="0"/>
-                <a:ea typeface="Noto Sans SC" pitchFamily="34" charset="-122"/>
-                <a:cs typeface="Noto Sans SC" pitchFamily="34" charset="-120"/>
-              </a:rPr>
-              <a:t>上午十点</a:t>
-            </a:r>
-            <a:pPr algn="l" indent="0" marL="0">
-              <a:lnSpc>
-                <a:spcPts val="1575"/>
-              </a:lnSpc>
-              <a:buNone/>
-            </a:pPr>
-            <a:r>
-              <a:rPr lang="en-US" sz="1050" dirty="0">
-                <a:solidFill>
-                  <a:srgbClr val="5B6677"/>
-                </a:solidFill>
-                <a:latin typeface="Noto Sans SC" pitchFamily="34" charset="0"/>
-                <a:ea typeface="Noto Sans SC" pitchFamily="34" charset="-122"/>
-                <a:cs typeface="Noto Sans SC" pitchFamily="34" charset="-120"/>
-              </a:rPr>
-              <a:t> — studying 学习</a:t>
-            </a:r>
-            <a:endParaRPr lang="en-US" sz="1050" dirty="0"/>
-          </a:p>
-          <a:p>
-            <a:pPr algn="l" indent="0" marL="0">
-              <a:lnSpc>
-                <a:spcPts val="1575"/>
-              </a:lnSpc>
-              <a:buNone/>
-            </a:pPr>
-            <a:r>
-              <a:rPr lang="en-US" sz="1050" b="1" dirty="0">
-                <a:solidFill>
-                  <a:srgbClr val="1E2A38"/>
-                </a:solidFill>
-                <a:latin typeface="Noto Sans SC" pitchFamily="34" charset="0"/>
-                <a:ea typeface="Noto Sans SC" pitchFamily="34" charset="-122"/>
-                <a:cs typeface="Noto Sans SC" pitchFamily="34" charset="-120"/>
-              </a:rPr>
-              <a:t>中午</a:t>
-            </a:r>
-            <a:pPr algn="l" indent="0" marL="0">
-              <a:lnSpc>
-                <a:spcPts val="1575"/>
-              </a:lnSpc>
-              <a:buNone/>
-            </a:pPr>
-            <a:r>
-              <a:rPr lang="en-US" sz="1050" dirty="0">
-                <a:solidFill>
-                  <a:srgbClr val="5B6677"/>
-                </a:solidFill>
-                <a:latin typeface="Noto Sans SC" pitchFamily="34" charset="0"/>
-                <a:ea typeface="Noto Sans SC" pitchFamily="34" charset="-122"/>
-                <a:cs typeface="Noto Sans SC" pitchFamily="34" charset="-120"/>
-              </a:rPr>
-              <a:t> </a:t>
-            </a:r>
-            <a:pPr algn="l" indent="0" marL="0">
-              <a:lnSpc>
-                <a:spcPts val="1575"/>
-              </a:lnSpc>
-              <a:buNone/>
-            </a:pPr>
-            <a:r>
-              <a:rPr lang="en-US" sz="1050" dirty="0">
-                <a:solidFill>
-                  <a:srgbClr val="5B6677"/>
-                </a:solidFill>
-                <a:latin typeface="Noto Sans SC" pitchFamily="34" charset="0"/>
-                <a:ea typeface="Noto Sans SC" pitchFamily="34" charset="-122"/>
-                <a:cs typeface="Noto Sans SC" pitchFamily="34" charset="-120"/>
-              </a:rPr>
-              <a:t>noon</a:t>
-            </a:r>
-            <a:pPr algn="l" indent="0" marL="0">
-              <a:lnSpc>
-                <a:spcPts val="1575"/>
-              </a:lnSpc>
-              <a:buNone/>
-            </a:pPr>
-            <a:r>
-              <a:rPr lang="en-US" sz="1050" dirty="0">
-                <a:solidFill>
-                  <a:srgbClr val="5B6677"/>
-                </a:solidFill>
-                <a:latin typeface="Noto Sans SC" pitchFamily="34" charset="0"/>
-                <a:ea typeface="Noto Sans SC" pitchFamily="34" charset="-122"/>
-                <a:cs typeface="Noto Sans SC" pitchFamily="34" charset="-120"/>
-              </a:rPr>
-              <a:t> — </a:t>
-            </a:r>
-            <a:pPr algn="l" indent="0" marL="0">
-              <a:lnSpc>
-                <a:spcPts val="1575"/>
-              </a:lnSpc>
-              <a:buNone/>
-            </a:pPr>
-            <a:r>
-              <a:rPr lang="en-US" sz="1050" b="1" dirty="0">
-                <a:solidFill>
-                  <a:srgbClr val="C8943E"/>
-                </a:solidFill>
-                <a:latin typeface="Noto Sans SC" pitchFamily="34" charset="0"/>
-                <a:ea typeface="Noto Sans SC" pitchFamily="34" charset="-122"/>
-                <a:cs typeface="Noto Sans SC" pitchFamily="34" charset="-120"/>
-              </a:rPr>
-              <a:t>中午十二点</a:t>
-            </a:r>
-            <a:pPr algn="l" indent="0" marL="0">
-              <a:lnSpc>
-                <a:spcPts val="1575"/>
-              </a:lnSpc>
-              <a:buNone/>
-            </a:pPr>
-            <a:r>
-              <a:rPr lang="en-US" sz="1050" dirty="0">
-                <a:solidFill>
-                  <a:srgbClr val="5B6677"/>
-                </a:solidFill>
-                <a:latin typeface="Noto Sans SC" pitchFamily="34" charset="0"/>
-                <a:ea typeface="Noto Sans SC" pitchFamily="34" charset="-122"/>
-                <a:cs typeface="Noto Sans SC" pitchFamily="34" charset="-120"/>
-              </a:rPr>
-              <a:t> — eating 吃饭</a:t>
-            </a:r>
-            <a:endParaRPr lang="en-US" sz="1050" dirty="0"/>
-          </a:p>
-          <a:p>
-            <a:pPr algn="l" indent="0" marL="0">
-              <a:lnSpc>
-                <a:spcPts val="1575"/>
-              </a:lnSpc>
-              <a:buNone/>
-            </a:pPr>
-            <a:r>
-              <a:rPr lang="en-US" sz="1050" b="1" dirty="0">
-                <a:solidFill>
-                  <a:srgbClr val="1E2A38"/>
-                </a:solidFill>
-                <a:latin typeface="Noto Sans SC" pitchFamily="34" charset="0"/>
-                <a:ea typeface="Noto Sans SC" pitchFamily="34" charset="-122"/>
-                <a:cs typeface="Noto Sans SC" pitchFamily="34" charset="-120"/>
-              </a:rPr>
-              <a:t>下午</a:t>
-            </a:r>
-            <a:pPr algn="l" indent="0" marL="0">
-              <a:lnSpc>
-                <a:spcPts val="1575"/>
-              </a:lnSpc>
-              <a:buNone/>
-            </a:pPr>
-            <a:r>
-              <a:rPr lang="en-US" sz="1050" dirty="0">
-                <a:solidFill>
-                  <a:srgbClr val="5B6677"/>
-                </a:solidFill>
-                <a:latin typeface="Noto Sans SC" pitchFamily="34" charset="0"/>
-                <a:ea typeface="Noto Sans SC" pitchFamily="34" charset="-122"/>
-                <a:cs typeface="Noto Sans SC" pitchFamily="34" charset="-120"/>
-              </a:rPr>
-              <a:t> </a:t>
-            </a:r>
-            <a:pPr algn="l" indent="0" marL="0">
-              <a:lnSpc>
-                <a:spcPts val="1575"/>
-              </a:lnSpc>
-              <a:buNone/>
-            </a:pPr>
-            <a:r>
-              <a:rPr lang="en-US" sz="1050" dirty="0">
-                <a:solidFill>
-                  <a:srgbClr val="5B6677"/>
-                </a:solidFill>
-                <a:latin typeface="Noto Sans SC" pitchFamily="34" charset="0"/>
-                <a:ea typeface="Noto Sans SC" pitchFamily="34" charset="-122"/>
-                <a:cs typeface="Noto Sans SC" pitchFamily="34" charset="-120"/>
-              </a:rPr>
-              <a:t>afternoon</a:t>
-            </a:r>
-            <a:pPr algn="l" indent="0" marL="0">
-              <a:lnSpc>
-                <a:spcPts val="1575"/>
-              </a:lnSpc>
-              <a:buNone/>
-            </a:pPr>
-            <a:r>
-              <a:rPr lang="en-US" sz="1050" dirty="0">
-                <a:solidFill>
-                  <a:srgbClr val="5B6677"/>
-                </a:solidFill>
-                <a:latin typeface="Noto Sans SC" pitchFamily="34" charset="0"/>
-                <a:ea typeface="Noto Sans SC" pitchFamily="34" charset="-122"/>
-                <a:cs typeface="Noto Sans SC" pitchFamily="34" charset="-120"/>
-              </a:rPr>
-              <a:t> — </a:t>
-            </a:r>
-            <a:pPr algn="l" indent="0" marL="0">
-              <a:lnSpc>
-                <a:spcPts val="1575"/>
-              </a:lnSpc>
-              <a:buNone/>
-            </a:pPr>
-            <a:r>
-              <a:rPr lang="en-US" sz="1050" b="1" dirty="0">
-                <a:solidFill>
-                  <a:srgbClr val="C8943E"/>
-                </a:solidFill>
-                <a:latin typeface="Noto Sans SC" pitchFamily="34" charset="0"/>
-                <a:ea typeface="Noto Sans SC" pitchFamily="34" charset="-122"/>
-                <a:cs typeface="Noto Sans SC" pitchFamily="34" charset="-120"/>
-              </a:rPr>
-              <a:t>下午四点</a:t>
-            </a:r>
-            <a:pPr algn="l" indent="0" marL="0">
-              <a:lnSpc>
-                <a:spcPts val="1575"/>
-              </a:lnSpc>
-              <a:buNone/>
-            </a:pPr>
-            <a:r>
-              <a:rPr lang="en-US" sz="1050" dirty="0">
-                <a:solidFill>
-                  <a:srgbClr val="5B6677"/>
-                </a:solidFill>
-                <a:latin typeface="Noto Sans SC" pitchFamily="34" charset="0"/>
-                <a:ea typeface="Noto Sans SC" pitchFamily="34" charset="-122"/>
-                <a:cs typeface="Noto Sans SC" pitchFamily="34" charset="-120"/>
-              </a:rPr>
-              <a:t> — playing football 踢足球</a:t>
-            </a:r>
-            <a:endParaRPr lang="en-US" sz="1050" dirty="0"/>
-          </a:p>
-          <a:p>
-            <a:pPr algn="l" indent="0" marL="0">
-              <a:lnSpc>
-                <a:spcPts val="1575"/>
-              </a:lnSpc>
-              <a:buNone/>
-            </a:pPr>
-            <a:r>
-              <a:rPr lang="en-US" sz="1050" b="1" dirty="0">
-                <a:solidFill>
-                  <a:srgbClr val="1E2A38"/>
-                </a:solidFill>
-                <a:latin typeface="Noto Sans SC" pitchFamily="34" charset="0"/>
-                <a:ea typeface="Noto Sans SC" pitchFamily="34" charset="-122"/>
-                <a:cs typeface="Noto Sans SC" pitchFamily="34" charset="-120"/>
-              </a:rPr>
-              <a:t>晚上</a:t>
-            </a:r>
-            <a:pPr algn="l" indent="0" marL="0">
-              <a:lnSpc>
-                <a:spcPts val="1575"/>
-              </a:lnSpc>
-              <a:buNone/>
-            </a:pPr>
-            <a:r>
-              <a:rPr lang="en-US" sz="1050" dirty="0">
-                <a:solidFill>
-                  <a:srgbClr val="5B6677"/>
-                </a:solidFill>
-                <a:latin typeface="Noto Sans SC" pitchFamily="34" charset="0"/>
-                <a:ea typeface="Noto Sans SC" pitchFamily="34" charset="-122"/>
-                <a:cs typeface="Noto Sans SC" pitchFamily="34" charset="-120"/>
-              </a:rPr>
-              <a:t> </a:t>
-            </a:r>
-            <a:pPr algn="l" indent="0" marL="0">
-              <a:lnSpc>
-                <a:spcPts val="1575"/>
-              </a:lnSpc>
-              <a:buNone/>
-            </a:pPr>
-            <a:r>
-              <a:rPr lang="en-US" sz="1050" dirty="0">
-                <a:solidFill>
-                  <a:srgbClr val="5B6677"/>
-                </a:solidFill>
-                <a:latin typeface="Noto Sans SC" pitchFamily="34" charset="0"/>
-                <a:ea typeface="Noto Sans SC" pitchFamily="34" charset="-122"/>
-                <a:cs typeface="Noto Sans SC" pitchFamily="34" charset="-120"/>
-              </a:rPr>
-              <a:t>18:00–24:00</a:t>
-            </a:r>
-            <a:pPr algn="l" indent="0" marL="0">
-              <a:lnSpc>
-                <a:spcPts val="1575"/>
-              </a:lnSpc>
-              <a:buNone/>
-            </a:pPr>
-            <a:r>
-              <a:rPr lang="en-US" sz="1050" dirty="0">
-                <a:solidFill>
-                  <a:srgbClr val="5B6677"/>
-                </a:solidFill>
-                <a:latin typeface="Noto Sans SC" pitchFamily="34" charset="0"/>
-                <a:ea typeface="Noto Sans SC" pitchFamily="34" charset="-122"/>
-                <a:cs typeface="Noto Sans SC" pitchFamily="34" charset="-120"/>
-              </a:rPr>
-              <a:t> — </a:t>
-            </a:r>
-            <a:pPr algn="l" indent="0" marL="0">
-              <a:lnSpc>
-                <a:spcPts val="1575"/>
-              </a:lnSpc>
-              <a:buNone/>
-            </a:pPr>
-            <a:r>
-              <a:rPr lang="en-US" sz="1050" b="1" dirty="0">
-                <a:solidFill>
-                  <a:srgbClr val="C8943E"/>
-                </a:solidFill>
-                <a:latin typeface="Noto Sans SC" pitchFamily="34" charset="0"/>
-                <a:ea typeface="Noto Sans SC" pitchFamily="34" charset="-122"/>
-                <a:cs typeface="Noto Sans SC" pitchFamily="34" charset="-120"/>
-              </a:rPr>
               <a:t>晚上八点</a:t>
             </a:r>
-            <a:pPr algn="l" indent="0" marL="0">
-              <a:lnSpc>
-                <a:spcPts val="1575"/>
-              </a:lnSpc>
-              <a:buNone/>
-            </a:pPr>
             <a:r>
               <a:rPr lang="en-US" sz="1050" dirty="0">
                 <a:solidFill>
@@ -14436,9 +13848,6 @@
               </a:rPr>
               <a:t>「早上七点」— is this 早上 or 上午? </a:t>
             </a:r>
-            <a:pPr algn="l" indent="0" marL="0">
-              <a:buNone/>
-            </a:pPr>
             <a:r>
               <a:rPr lang="en-US" sz="1100" b="1" dirty="0">
                 <a:solidFill>
@@ -15752,12 +15161,6 @@
               </a:rPr>
               <a:t>早上 = only the early morning, roughly </a:t>
             </a:r>
-            <a:pPr algn="l" indent="0" marL="0">
-              <a:lnSpc>
-                <a:spcPts val="1470"/>
-              </a:lnSpc>
-              <a:buNone/>
-            </a:pPr>
             <a:r>
               <a:rPr lang="en-US" sz="1050" b="1" dirty="0">
                 <a:solidFill>
@@ -15769,12 +15172,6 @@
               </a:rPr>
               <a:t>5:00–8:00</a:t>
             </a:r>
-            <a:pPr algn="l" indent="0" marL="0">
-              <a:lnSpc>
-                <a:spcPts val="1470"/>
-              </a:lnSpc>
-              <a:buNone/>
-            </a:pPr>
             <a:r>
               <a:rPr lang="en-US" sz="1050" dirty="0">
                 <a:solidFill>
@@ -15786,12 +15183,6 @@
               </a:rPr>
               <a:t>. 上午 = anything </a:t>
             </a:r>
-            <a:pPr algn="l" indent="0" marL="0">
-              <a:lnSpc>
-                <a:spcPts val="1470"/>
-              </a:lnSpc>
-              <a:buNone/>
-            </a:pPr>
             <a:r>
               <a:rPr lang="en-US" sz="1050" b="1" dirty="0">
                 <a:solidFill>
@@ -15803,12 +15194,6 @@
               </a:rPr>
               <a:t>before noon</a:t>
             </a:r>
-            <a:pPr algn="l" indent="0" marL="0">
-              <a:lnSpc>
-                <a:spcPts val="1470"/>
-              </a:lnSpc>
-              <a:buNone/>
-            </a:pPr>
             <a:r>
               <a:rPr lang="en-US" sz="1050" dirty="0">
                 <a:solidFill>
@@ -17367,9 +16752,6 @@
               </a:rPr>
               <a:t>___</a:t>
             </a:r>
-            <a:pPr algn="l" indent="0" marL="0">
-              <a:buNone/>
-            </a:pPr>
             <a:r>
               <a:rPr lang="en-US" sz="1400" b="1" dirty="0">
                 <a:solidFill>
